--- a/docs/pptx/whole/ritu-linsubhr-ratio-hosp2_10pct.pptx
+++ b/docs/pptx/whole/ritu-linsubhr-ratio-hosp2_10pct.pptx
@@ -2443,7 +2443,7 @@
           </p:nvSpPr>
           <p:spPr>
             <a:xfrm>
-              <a:off x="955490" y="2073503"/>
+              <a:off x="957589" y="2073503"/>
               <a:ext cx="0" cy="3649639"/>
             </a:xfrm>
             <a:custGeom>
@@ -2486,7 +2486,7 @@
           </p:nvSpPr>
           <p:spPr>
             <a:xfrm>
-              <a:off x="1892768" y="2073503"/>
+              <a:off x="1893867" y="2073503"/>
               <a:ext cx="0" cy="3649639"/>
             </a:xfrm>
             <a:custGeom>
@@ -2529,7 +2529,7 @@
           </p:nvSpPr>
           <p:spPr>
             <a:xfrm>
-              <a:off x="2830046" y="2073503"/>
+              <a:off x="2830144" y="2073503"/>
               <a:ext cx="0" cy="3649639"/>
             </a:xfrm>
             <a:custGeom>
@@ -2572,7 +2572,7 @@
           </p:nvSpPr>
           <p:spPr>
             <a:xfrm>
-              <a:off x="3767323" y="2073503"/>
+              <a:off x="3766422" y="2073503"/>
               <a:ext cx="0" cy="3649639"/>
             </a:xfrm>
             <a:custGeom>
@@ -2615,7 +2615,7 @@
           </p:nvSpPr>
           <p:spPr>
             <a:xfrm>
-              <a:off x="4704601" y="2073503"/>
+              <a:off x="4702700" y="2073503"/>
               <a:ext cx="0" cy="3649639"/>
             </a:xfrm>
             <a:custGeom>
@@ -2658,7 +2658,7 @@
           </p:nvSpPr>
           <p:spPr>
             <a:xfrm>
-              <a:off x="5641878" y="2073503"/>
+              <a:off x="5638978" y="2073503"/>
               <a:ext cx="0" cy="3649639"/>
             </a:xfrm>
             <a:custGeom>
@@ -2701,7 +2701,7 @@
           </p:nvSpPr>
           <p:spPr>
             <a:xfrm>
-              <a:off x="6579156" y="2073503"/>
+              <a:off x="6575256" y="2073503"/>
               <a:ext cx="0" cy="3649639"/>
             </a:xfrm>
             <a:custGeom>
@@ -2744,7 +2744,7 @@
           </p:nvSpPr>
           <p:spPr>
             <a:xfrm>
-              <a:off x="7516433" y="2073503"/>
+              <a:off x="7511534" y="2073503"/>
               <a:ext cx="0" cy="3649639"/>
             </a:xfrm>
             <a:custGeom>
@@ -2787,7 +2787,7 @@
           </p:nvSpPr>
           <p:spPr>
             <a:xfrm>
-              <a:off x="8453711" y="2073503"/>
+              <a:off x="8447812" y="2073503"/>
               <a:ext cx="0" cy="3649639"/>
             </a:xfrm>
             <a:custGeom>
@@ -3045,7 +3045,7 @@
           </p:nvSpPr>
           <p:spPr>
             <a:xfrm>
-              <a:off x="1424129" y="2073503"/>
+              <a:off x="1425728" y="2073503"/>
               <a:ext cx="0" cy="3649639"/>
             </a:xfrm>
             <a:custGeom>
@@ -3088,7 +3088,7 @@
           </p:nvSpPr>
           <p:spPr>
             <a:xfrm>
-              <a:off x="2361407" y="2073503"/>
+              <a:off x="2362006" y="2073503"/>
               <a:ext cx="0" cy="3649639"/>
             </a:xfrm>
             <a:custGeom>
@@ -3131,7 +3131,7 @@
           </p:nvSpPr>
           <p:spPr>
             <a:xfrm>
-              <a:off x="3298684" y="2073503"/>
+              <a:off x="3298283" y="2073503"/>
               <a:ext cx="0" cy="3649639"/>
             </a:xfrm>
             <a:custGeom>
@@ -3174,7 +3174,7 @@
           </p:nvSpPr>
           <p:spPr>
             <a:xfrm>
-              <a:off x="4235962" y="2073503"/>
+              <a:off x="4234561" y="2073503"/>
               <a:ext cx="0" cy="3649639"/>
             </a:xfrm>
             <a:custGeom>
@@ -3217,7 +3217,7 @@
           </p:nvSpPr>
           <p:spPr>
             <a:xfrm>
-              <a:off x="5173239" y="2073503"/>
+              <a:off x="5170839" y="2073503"/>
               <a:ext cx="0" cy="3649639"/>
             </a:xfrm>
             <a:custGeom>
@@ -3260,7 +3260,7 @@
           </p:nvSpPr>
           <p:spPr>
             <a:xfrm>
-              <a:off x="6110517" y="2073503"/>
+              <a:off x="6107117" y="2073503"/>
               <a:ext cx="0" cy="3649639"/>
             </a:xfrm>
             <a:custGeom>
@@ -3303,7 +3303,7 @@
           </p:nvSpPr>
           <p:spPr>
             <a:xfrm>
-              <a:off x="7047795" y="2073503"/>
+              <a:off x="7043395" y="2073503"/>
               <a:ext cx="0" cy="3649639"/>
             </a:xfrm>
             <a:custGeom>
@@ -3346,7 +3346,7 @@
           </p:nvSpPr>
           <p:spPr>
             <a:xfrm>
-              <a:off x="7985072" y="2073503"/>
+              <a:off x="7979673" y="2073503"/>
               <a:ext cx="0" cy="3649639"/>
             </a:xfrm>
             <a:custGeom>
@@ -3390,536 +3390,533 @@
           <p:spPr>
             <a:xfrm>
               <a:off x="1172049" y="2073503"/>
-              <a:ext cx="7090630" cy="3473482"/>
+              <a:ext cx="7090630" cy="3476809"/>
             </a:xfrm>
             <a:custGeom>
               <a:avLst/>
               <a:pathLst>
-                <a:path w="7090630" h="3473482">
+                <a:path w="7090630" h="3476809">
                   <a:moveTo>
-                    <a:pt x="1851655" y="0"/>
+                    <a:pt x="1957988" y="0"/>
                   </a:moveTo>
                   <a:lnTo>
-                    <a:pt x="1862185" y="41956"/>
-                  </a:lnTo>
-                  <a:lnTo>
-                    <a:pt x="1933808" y="305486"/>
-                  </a:lnTo>
-                  <a:lnTo>
-                    <a:pt x="2005430" y="548839"/>
-                  </a:lnTo>
-                  <a:lnTo>
-                    <a:pt x="2077053" y="773559"/>
-                  </a:lnTo>
-                  <a:lnTo>
-                    <a:pt x="2148675" y="981072"/>
-                  </a:lnTo>
-                  <a:lnTo>
-                    <a:pt x="2220298" y="1172697"/>
-                  </a:lnTo>
-                  <a:lnTo>
-                    <a:pt x="2291920" y="1349649"/>
-                  </a:lnTo>
-                  <a:lnTo>
-                    <a:pt x="2363543" y="1513052"/>
-                  </a:lnTo>
-                  <a:lnTo>
-                    <a:pt x="2435165" y="1663944"/>
-                  </a:lnTo>
-                  <a:lnTo>
-                    <a:pt x="2506788" y="1803282"/>
-                  </a:lnTo>
-                  <a:lnTo>
-                    <a:pt x="2578410" y="1931952"/>
-                  </a:lnTo>
-                  <a:lnTo>
-                    <a:pt x="2650033" y="2050769"/>
-                  </a:lnTo>
-                  <a:lnTo>
-                    <a:pt x="2721655" y="2160489"/>
-                  </a:lnTo>
-                  <a:lnTo>
-                    <a:pt x="2793278" y="2261808"/>
-                  </a:lnTo>
-                  <a:lnTo>
-                    <a:pt x="2864901" y="2355370"/>
-                  </a:lnTo>
-                  <a:lnTo>
-                    <a:pt x="2936523" y="2441767"/>
-                  </a:lnTo>
-                  <a:lnTo>
-                    <a:pt x="3008146" y="2521549"/>
-                  </a:lnTo>
-                  <a:lnTo>
-                    <a:pt x="3079768" y="2595223"/>
-                  </a:lnTo>
-                  <a:lnTo>
-                    <a:pt x="3151391" y="2656561"/>
-                  </a:lnTo>
-                  <a:lnTo>
-                    <a:pt x="3223013" y="2673060"/>
-                  </a:lnTo>
-                  <a:lnTo>
-                    <a:pt x="3294636" y="2689230"/>
-                  </a:lnTo>
-                  <a:lnTo>
-                    <a:pt x="3366258" y="2705077"/>
-                  </a:lnTo>
-                  <a:lnTo>
-                    <a:pt x="3437881" y="2720608"/>
-                  </a:lnTo>
-                  <a:lnTo>
-                    <a:pt x="3509503" y="2735829"/>
-                  </a:lnTo>
-                  <a:lnTo>
-                    <a:pt x="3581126" y="2750747"/>
-                  </a:lnTo>
-                  <a:lnTo>
-                    <a:pt x="3652748" y="2765367"/>
-                  </a:lnTo>
-                  <a:lnTo>
-                    <a:pt x="3724371" y="2779696"/>
-                  </a:lnTo>
-                  <a:lnTo>
-                    <a:pt x="3795993" y="2793738"/>
-                  </a:lnTo>
-                  <a:lnTo>
-                    <a:pt x="3867616" y="2807501"/>
-                  </a:lnTo>
-                  <a:lnTo>
-                    <a:pt x="3939238" y="2820989"/>
-                  </a:lnTo>
-                  <a:lnTo>
-                    <a:pt x="4010861" y="2834208"/>
-                  </a:lnTo>
-                  <a:lnTo>
-                    <a:pt x="4082483" y="2847164"/>
-                  </a:lnTo>
-                  <a:lnTo>
-                    <a:pt x="4154106" y="2859861"/>
-                  </a:lnTo>
-                  <a:lnTo>
-                    <a:pt x="4225729" y="2872305"/>
-                  </a:lnTo>
-                  <a:lnTo>
-                    <a:pt x="4297351" y="2884500"/>
-                  </a:lnTo>
-                  <a:lnTo>
-                    <a:pt x="4368974" y="2896453"/>
-                  </a:lnTo>
-                  <a:lnTo>
-                    <a:pt x="4440596" y="2908167"/>
-                  </a:lnTo>
-                  <a:lnTo>
-                    <a:pt x="4512219" y="2919647"/>
-                  </a:lnTo>
-                  <a:lnTo>
-                    <a:pt x="4583841" y="2930898"/>
-                  </a:lnTo>
-                  <a:lnTo>
-                    <a:pt x="4655464" y="2941925"/>
-                  </a:lnTo>
-                  <a:lnTo>
-                    <a:pt x="4727086" y="2952732"/>
-                  </a:lnTo>
-                  <a:lnTo>
-                    <a:pt x="4798709" y="2963324"/>
-                  </a:lnTo>
-                  <a:lnTo>
-                    <a:pt x="4870331" y="2973704"/>
-                  </a:lnTo>
-                  <a:lnTo>
-                    <a:pt x="4941954" y="2983877"/>
-                  </a:lnTo>
-                  <a:lnTo>
-                    <a:pt x="5013576" y="2993847"/>
-                  </a:lnTo>
-                  <a:lnTo>
-                    <a:pt x="5085199" y="3003618"/>
-                  </a:lnTo>
-                  <a:lnTo>
-                    <a:pt x="5156821" y="3013195"/>
-                  </a:lnTo>
-                  <a:lnTo>
-                    <a:pt x="5228444" y="3022580"/>
-                  </a:lnTo>
-                  <a:lnTo>
-                    <a:pt x="5300066" y="3031779"/>
-                  </a:lnTo>
-                  <a:lnTo>
-                    <a:pt x="5371689" y="3040793"/>
-                  </a:lnTo>
-                  <a:lnTo>
-                    <a:pt x="5443311" y="3049628"/>
-                  </a:lnTo>
-                  <a:lnTo>
-                    <a:pt x="5514934" y="3058287"/>
-                  </a:lnTo>
-                  <a:lnTo>
-                    <a:pt x="5586557" y="3066773"/>
-                  </a:lnTo>
-                  <a:lnTo>
-                    <a:pt x="5658179" y="3075090"/>
-                  </a:lnTo>
-                  <a:lnTo>
-                    <a:pt x="5729802" y="3083241"/>
-                  </a:lnTo>
-                  <a:lnTo>
-                    <a:pt x="5801424" y="3091229"/>
-                  </a:lnTo>
-                  <a:lnTo>
-                    <a:pt x="5873047" y="3099058"/>
-                  </a:lnTo>
-                  <a:lnTo>
-                    <a:pt x="5944669" y="3106731"/>
-                  </a:lnTo>
-                  <a:lnTo>
-                    <a:pt x="6016292" y="3114251"/>
-                  </a:lnTo>
-                  <a:lnTo>
-                    <a:pt x="6087914" y="3121621"/>
-                  </a:lnTo>
-                  <a:lnTo>
-                    <a:pt x="6159537" y="3128844"/>
-                  </a:lnTo>
-                  <a:lnTo>
-                    <a:pt x="6231159" y="3135922"/>
-                  </a:lnTo>
-                  <a:lnTo>
-                    <a:pt x="6302782" y="3142860"/>
-                  </a:lnTo>
-                  <a:lnTo>
-                    <a:pt x="6374404" y="3149659"/>
-                  </a:lnTo>
-                  <a:lnTo>
-                    <a:pt x="6446027" y="3156323"/>
-                  </a:lnTo>
-                  <a:lnTo>
-                    <a:pt x="6517649" y="3162853"/>
-                  </a:lnTo>
-                  <a:lnTo>
-                    <a:pt x="6589272" y="3169254"/>
-                  </a:lnTo>
-                  <a:lnTo>
-                    <a:pt x="6660894" y="3175527"/>
-                  </a:lnTo>
-                  <a:lnTo>
-                    <a:pt x="6732517" y="3181674"/>
-                  </a:lnTo>
-                  <a:lnTo>
-                    <a:pt x="6804139" y="3187699"/>
-                  </a:lnTo>
-                  <a:lnTo>
-                    <a:pt x="6875762" y="3193604"/>
-                  </a:lnTo>
-                  <a:lnTo>
-                    <a:pt x="6947385" y="3199391"/>
-                  </a:lnTo>
-                  <a:lnTo>
-                    <a:pt x="7019007" y="3205063"/>
-                  </a:lnTo>
-                  <a:lnTo>
-                    <a:pt x="7090630" y="3210621"/>
-                  </a:lnTo>
-                  <a:lnTo>
-                    <a:pt x="7090630" y="3473482"/>
-                  </a:lnTo>
-                  <a:lnTo>
-                    <a:pt x="7019007" y="3472631"/>
-                  </a:lnTo>
-                  <a:lnTo>
-                    <a:pt x="6947385" y="3471709"/>
-                  </a:lnTo>
-                  <a:lnTo>
-                    <a:pt x="6875762" y="3470711"/>
-                  </a:lnTo>
-                  <a:lnTo>
-                    <a:pt x="6804139" y="3469630"/>
-                  </a:lnTo>
-                  <a:lnTo>
-                    <a:pt x="6732517" y="3468459"/>
-                  </a:lnTo>
-                  <a:lnTo>
-                    <a:pt x="6660894" y="3467192"/>
-                  </a:lnTo>
-                  <a:lnTo>
-                    <a:pt x="6589272" y="3465819"/>
-                  </a:lnTo>
-                  <a:lnTo>
-                    <a:pt x="6517649" y="3464333"/>
-                  </a:lnTo>
-                  <a:lnTo>
-                    <a:pt x="6446027" y="3462723"/>
-                  </a:lnTo>
-                  <a:lnTo>
-                    <a:pt x="6374404" y="3460980"/>
-                  </a:lnTo>
-                  <a:lnTo>
-                    <a:pt x="6302782" y="3459092"/>
-                  </a:lnTo>
-                  <a:lnTo>
-                    <a:pt x="6231159" y="3457048"/>
-                  </a:lnTo>
-                  <a:lnTo>
-                    <a:pt x="6159537" y="3454834"/>
-                  </a:lnTo>
-                  <a:lnTo>
-                    <a:pt x="6087914" y="3452437"/>
-                  </a:lnTo>
-                  <a:lnTo>
-                    <a:pt x="6016292" y="3449841"/>
-                  </a:lnTo>
-                  <a:lnTo>
-                    <a:pt x="5944669" y="3447029"/>
-                  </a:lnTo>
-                  <a:lnTo>
-                    <a:pt x="5873047" y="3443985"/>
-                  </a:lnTo>
-                  <a:lnTo>
-                    <a:pt x="5801424" y="3440688"/>
-                  </a:lnTo>
-                  <a:lnTo>
-                    <a:pt x="5729802" y="3437118"/>
-                  </a:lnTo>
-                  <a:lnTo>
-                    <a:pt x="5658179" y="3433251"/>
-                  </a:lnTo>
-                  <a:lnTo>
-                    <a:pt x="5586557" y="3429065"/>
-                  </a:lnTo>
-                  <a:lnTo>
-                    <a:pt x="5514934" y="3424531"/>
-                  </a:lnTo>
-                  <a:lnTo>
-                    <a:pt x="5443311" y="3419621"/>
-                  </a:lnTo>
-                  <a:lnTo>
-                    <a:pt x="5371689" y="3414303"/>
-                  </a:lnTo>
-                  <a:lnTo>
-                    <a:pt x="5300066" y="3408545"/>
-                  </a:lnTo>
-                  <a:lnTo>
-                    <a:pt x="5228444" y="3402310"/>
-                  </a:lnTo>
-                  <a:lnTo>
-                    <a:pt x="5156821" y="3395558"/>
-                  </a:lnTo>
-                  <a:lnTo>
-                    <a:pt x="5085199" y="3388245"/>
-                  </a:lnTo>
-                  <a:lnTo>
-                    <a:pt x="5013576" y="3380327"/>
-                  </a:lnTo>
-                  <a:lnTo>
-                    <a:pt x="4941954" y="3371751"/>
-                  </a:lnTo>
-                  <a:lnTo>
-                    <a:pt x="4870331" y="3362465"/>
-                  </a:lnTo>
-                  <a:lnTo>
-                    <a:pt x="4798709" y="3352409"/>
-                  </a:lnTo>
-                  <a:lnTo>
-                    <a:pt x="4727086" y="3341519"/>
-                  </a:lnTo>
-                  <a:lnTo>
-                    <a:pt x="4655464" y="3329726"/>
-                  </a:lnTo>
-                  <a:lnTo>
-                    <a:pt x="4583841" y="3316955"/>
-                  </a:lnTo>
-                  <a:lnTo>
-                    <a:pt x="4512219" y="3303125"/>
-                  </a:lnTo>
-                  <a:lnTo>
-                    <a:pt x="4440596" y="3288149"/>
-                  </a:lnTo>
-                  <a:lnTo>
-                    <a:pt x="4368974" y="3271930"/>
-                  </a:lnTo>
-                  <a:lnTo>
-                    <a:pt x="4297351" y="3254367"/>
-                  </a:lnTo>
-                  <a:lnTo>
-                    <a:pt x="4225729" y="3235348"/>
-                  </a:lnTo>
-                  <a:lnTo>
-                    <a:pt x="4154106" y="3214752"/>
-                  </a:lnTo>
-                  <a:lnTo>
-                    <a:pt x="4082483" y="3192448"/>
-                  </a:lnTo>
-                  <a:lnTo>
-                    <a:pt x="4010861" y="3168294"/>
-                  </a:lnTo>
-                  <a:lnTo>
-                    <a:pt x="3939238" y="3142138"/>
-                  </a:lnTo>
-                  <a:lnTo>
-                    <a:pt x="3867616" y="3113813"/>
-                  </a:lnTo>
-                  <a:lnTo>
-                    <a:pt x="3795993" y="3083139"/>
-                  </a:lnTo>
-                  <a:lnTo>
-                    <a:pt x="3724371" y="3049922"/>
-                  </a:lnTo>
-                  <a:lnTo>
-                    <a:pt x="3652748" y="3013951"/>
-                  </a:lnTo>
-                  <a:lnTo>
-                    <a:pt x="3581126" y="2974997"/>
-                  </a:lnTo>
-                  <a:lnTo>
-                    <a:pt x="3509503" y="2932813"/>
-                  </a:lnTo>
-                  <a:lnTo>
-                    <a:pt x="3437881" y="2887132"/>
-                  </a:lnTo>
-                  <a:lnTo>
-                    <a:pt x="3366258" y="2837662"/>
-                  </a:lnTo>
-                  <a:lnTo>
-                    <a:pt x="3294636" y="2784091"/>
-                  </a:lnTo>
-                  <a:lnTo>
-                    <a:pt x="3223013" y="2726078"/>
-                  </a:lnTo>
-                  <a:lnTo>
-                    <a:pt x="3151391" y="2663255"/>
-                  </a:lnTo>
-                  <a:lnTo>
-                    <a:pt x="3079768" y="2639727"/>
-                  </a:lnTo>
-                  <a:lnTo>
-                    <a:pt x="3008146" y="2622550"/>
-                  </a:lnTo>
-                  <a:lnTo>
-                    <a:pt x="2936523" y="2605023"/>
-                  </a:lnTo>
-                  <a:lnTo>
-                    <a:pt x="2864901" y="2587140"/>
-                  </a:lnTo>
-                  <a:lnTo>
-                    <a:pt x="2793278" y="2568892"/>
-                  </a:lnTo>
-                  <a:lnTo>
-                    <a:pt x="2721655" y="2550273"/>
-                  </a:lnTo>
-                  <a:lnTo>
-                    <a:pt x="2650033" y="2531276"/>
-                  </a:lnTo>
-                  <a:lnTo>
-                    <a:pt x="2578410" y="2511892"/>
-                  </a:lnTo>
-                  <a:lnTo>
-                    <a:pt x="2506788" y="2492113"/>
-                  </a:lnTo>
-                  <a:lnTo>
-                    <a:pt x="2435165" y="2471931"/>
-                  </a:lnTo>
-                  <a:lnTo>
-                    <a:pt x="2363543" y="2451339"/>
-                  </a:lnTo>
-                  <a:lnTo>
-                    <a:pt x="2291920" y="2430328"/>
-                  </a:lnTo>
-                  <a:lnTo>
-                    <a:pt x="2220298" y="2408890"/>
-                  </a:lnTo>
-                  <a:lnTo>
-                    <a:pt x="2148675" y="2387015"/>
-                  </a:lnTo>
-                  <a:lnTo>
-                    <a:pt x="2077053" y="2364694"/>
-                  </a:lnTo>
-                  <a:lnTo>
-                    <a:pt x="2005430" y="2341920"/>
-                  </a:lnTo>
-                  <a:lnTo>
-                    <a:pt x="1933808" y="2318682"/>
-                  </a:lnTo>
-                  <a:lnTo>
-                    <a:pt x="1862185" y="2294971"/>
-                  </a:lnTo>
-                  <a:lnTo>
-                    <a:pt x="1790563" y="2270778"/>
-                  </a:lnTo>
-                  <a:lnTo>
-                    <a:pt x="1718940" y="2246092"/>
-                  </a:lnTo>
-                  <a:lnTo>
-                    <a:pt x="1647318" y="2220904"/>
-                  </a:lnTo>
-                  <a:lnTo>
-                    <a:pt x="1575695" y="2195203"/>
-                  </a:lnTo>
-                  <a:lnTo>
-                    <a:pt x="1504073" y="2168979"/>
-                  </a:lnTo>
-                  <a:lnTo>
-                    <a:pt x="1432450" y="2142221"/>
-                  </a:lnTo>
-                  <a:lnTo>
-                    <a:pt x="1360827" y="2114919"/>
-                  </a:lnTo>
-                  <a:lnTo>
-                    <a:pt x="1289205" y="2087061"/>
-                  </a:lnTo>
-                  <a:lnTo>
-                    <a:pt x="1217582" y="2058636"/>
-                  </a:lnTo>
-                  <a:lnTo>
-                    <a:pt x="1145960" y="2029633"/>
-                  </a:lnTo>
-                  <a:lnTo>
-                    <a:pt x="1074337" y="2000040"/>
-                  </a:lnTo>
-                  <a:lnTo>
-                    <a:pt x="1002715" y="1969844"/>
-                  </a:lnTo>
-                  <a:lnTo>
-                    <a:pt x="931092" y="1939034"/>
-                  </a:lnTo>
-                  <a:lnTo>
-                    <a:pt x="859470" y="1907596"/>
-                  </a:lnTo>
-                  <a:lnTo>
-                    <a:pt x="787847" y="1875519"/>
-                  </a:lnTo>
-                  <a:lnTo>
-                    <a:pt x="716225" y="1842789"/>
-                  </a:lnTo>
-                  <a:lnTo>
-                    <a:pt x="644602" y="1809393"/>
-                  </a:lnTo>
-                  <a:lnTo>
-                    <a:pt x="572980" y="1775317"/>
-                  </a:lnTo>
-                  <a:lnTo>
-                    <a:pt x="501357" y="1740548"/>
-                  </a:lnTo>
-                  <a:lnTo>
-                    <a:pt x="429735" y="1705071"/>
-                  </a:lnTo>
-                  <a:lnTo>
-                    <a:pt x="358112" y="1668873"/>
-                  </a:lnTo>
-                  <a:lnTo>
-                    <a:pt x="286490" y="1631937"/>
-                  </a:lnTo>
-                  <a:lnTo>
-                    <a:pt x="214867" y="1594250"/>
-                  </a:lnTo>
-                  <a:lnTo>
-                    <a:pt x="143245" y="1555796"/>
-                  </a:lnTo>
-                  <a:lnTo>
-                    <a:pt x="71622" y="1516559"/>
-                  </a:lnTo>
-                  <a:lnTo>
-                    <a:pt x="0" y="1476523"/>
+                    <a:pt x="2005430" y="197325"/>
+                  </a:lnTo>
+                  <a:lnTo>
+                    <a:pt x="2077053" y="470465"/>
+                  </a:lnTo>
+                  <a:lnTo>
+                    <a:pt x="2148675" y="720905"/>
+                  </a:lnTo>
+                  <a:lnTo>
+                    <a:pt x="2220298" y="950529"/>
+                  </a:lnTo>
+                  <a:lnTo>
+                    <a:pt x="2291920" y="1161070"/>
+                  </a:lnTo>
+                  <a:lnTo>
+                    <a:pt x="2363543" y="1354111"/>
+                  </a:lnTo>
+                  <a:lnTo>
+                    <a:pt x="2435165" y="1531109"/>
+                  </a:lnTo>
+                  <a:lnTo>
+                    <a:pt x="2506788" y="1693396"/>
+                  </a:lnTo>
+                  <a:lnTo>
+                    <a:pt x="2578410" y="1842196"/>
+                  </a:lnTo>
+                  <a:lnTo>
+                    <a:pt x="2650033" y="1978628"/>
+                  </a:lnTo>
+                  <a:lnTo>
+                    <a:pt x="2721655" y="2103721"/>
+                  </a:lnTo>
+                  <a:lnTo>
+                    <a:pt x="2793278" y="2218417"/>
+                  </a:lnTo>
+                  <a:lnTo>
+                    <a:pt x="2864901" y="2323581"/>
+                  </a:lnTo>
+                  <a:lnTo>
+                    <a:pt x="2936523" y="2420005"/>
+                  </a:lnTo>
+                  <a:lnTo>
+                    <a:pt x="3008146" y="2508414"/>
+                  </a:lnTo>
+                  <a:lnTo>
+                    <a:pt x="3079768" y="2589476"/>
+                  </a:lnTo>
+                  <a:lnTo>
+                    <a:pt x="3151391" y="2656764"/>
+                  </a:lnTo>
+                  <a:lnTo>
+                    <a:pt x="3223013" y="2675182"/>
+                  </a:lnTo>
+                  <a:lnTo>
+                    <a:pt x="3294636" y="2693191"/>
+                  </a:lnTo>
+                  <a:lnTo>
+                    <a:pt x="3366258" y="2710798"/>
+                  </a:lnTo>
+                  <a:lnTo>
+                    <a:pt x="3437881" y="2728013"/>
+                  </a:lnTo>
+                  <a:lnTo>
+                    <a:pt x="3509503" y="2744845"/>
+                  </a:lnTo>
+                  <a:lnTo>
+                    <a:pt x="3581126" y="2761302"/>
+                  </a:lnTo>
+                  <a:lnTo>
+                    <a:pt x="3652748" y="2777392"/>
+                  </a:lnTo>
+                  <a:lnTo>
+                    <a:pt x="3724371" y="2793124"/>
+                  </a:lnTo>
+                  <a:lnTo>
+                    <a:pt x="3795993" y="2808505"/>
+                  </a:lnTo>
+                  <a:lnTo>
+                    <a:pt x="3867616" y="2823544"/>
+                  </a:lnTo>
+                  <a:lnTo>
+                    <a:pt x="3939238" y="2838248"/>
+                  </a:lnTo>
+                  <a:lnTo>
+                    <a:pt x="4010861" y="2852625"/>
+                  </a:lnTo>
+                  <a:lnTo>
+                    <a:pt x="4082483" y="2866681"/>
+                  </a:lnTo>
+                  <a:lnTo>
+                    <a:pt x="4154106" y="2880424"/>
+                  </a:lnTo>
+                  <a:lnTo>
+                    <a:pt x="4225729" y="2893862"/>
+                  </a:lnTo>
+                  <a:lnTo>
+                    <a:pt x="4297351" y="2906999"/>
+                  </a:lnTo>
+                  <a:lnTo>
+                    <a:pt x="4368974" y="2919845"/>
+                  </a:lnTo>
+                  <a:lnTo>
+                    <a:pt x="4440596" y="2932404"/>
+                  </a:lnTo>
+                  <a:lnTo>
+                    <a:pt x="4512219" y="2944683"/>
+                  </a:lnTo>
+                  <a:lnTo>
+                    <a:pt x="4583841" y="2956689"/>
+                  </a:lnTo>
+                  <a:lnTo>
+                    <a:pt x="4655464" y="2968428"/>
+                  </a:lnTo>
+                  <a:lnTo>
+                    <a:pt x="4727086" y="2979905"/>
+                  </a:lnTo>
+                  <a:lnTo>
+                    <a:pt x="4798709" y="2991127"/>
+                  </a:lnTo>
+                  <a:lnTo>
+                    <a:pt x="4870331" y="3002098"/>
+                  </a:lnTo>
+                  <a:lnTo>
+                    <a:pt x="4941954" y="3012826"/>
+                  </a:lnTo>
+                  <a:lnTo>
+                    <a:pt x="5013576" y="3023314"/>
+                  </a:lnTo>
+                  <a:lnTo>
+                    <a:pt x="5085199" y="3033569"/>
+                  </a:lnTo>
+                  <a:lnTo>
+                    <a:pt x="5156821" y="3043595"/>
+                  </a:lnTo>
+                  <a:lnTo>
+                    <a:pt x="5228444" y="3053398"/>
+                  </a:lnTo>
+                  <a:lnTo>
+                    <a:pt x="5300066" y="3062983"/>
+                  </a:lnTo>
+                  <a:lnTo>
+                    <a:pt x="5371689" y="3072354"/>
+                  </a:lnTo>
+                  <a:lnTo>
+                    <a:pt x="5443311" y="3081516"/>
+                  </a:lnTo>
+                  <a:lnTo>
+                    <a:pt x="5514934" y="3090475"/>
+                  </a:lnTo>
+                  <a:lnTo>
+                    <a:pt x="5586557" y="3099234"/>
+                  </a:lnTo>
+                  <a:lnTo>
+                    <a:pt x="5658179" y="3107798"/>
+                  </a:lnTo>
+                  <a:lnTo>
+                    <a:pt x="5729802" y="3116171"/>
+                  </a:lnTo>
+                  <a:lnTo>
+                    <a:pt x="5801424" y="3124357"/>
+                  </a:lnTo>
+                  <a:lnTo>
+                    <a:pt x="5873047" y="3132362"/>
+                  </a:lnTo>
+                  <a:lnTo>
+                    <a:pt x="5944669" y="3140188"/>
+                  </a:lnTo>
+                  <a:lnTo>
+                    <a:pt x="6016292" y="3147840"/>
+                  </a:lnTo>
+                  <a:lnTo>
+                    <a:pt x="6087914" y="3155321"/>
+                  </a:lnTo>
+                  <a:lnTo>
+                    <a:pt x="6159537" y="3162636"/>
+                  </a:lnTo>
+                  <a:lnTo>
+                    <a:pt x="6231159" y="3169787"/>
+                  </a:lnTo>
+                  <a:lnTo>
+                    <a:pt x="6302782" y="3176780"/>
+                  </a:lnTo>
+                  <a:lnTo>
+                    <a:pt x="6374404" y="3183617"/>
+                  </a:lnTo>
+                  <a:lnTo>
+                    <a:pt x="6446027" y="3190301"/>
+                  </a:lnTo>
+                  <a:lnTo>
+                    <a:pt x="6517649" y="3196837"/>
+                  </a:lnTo>
+                  <a:lnTo>
+                    <a:pt x="6589272" y="3203227"/>
+                  </a:lnTo>
+                  <a:lnTo>
+                    <a:pt x="6660894" y="3209474"/>
+                  </a:lnTo>
+                  <a:lnTo>
+                    <a:pt x="6732517" y="3215583"/>
+                  </a:lnTo>
+                  <a:lnTo>
+                    <a:pt x="6804139" y="3221556"/>
+                  </a:lnTo>
+                  <a:lnTo>
+                    <a:pt x="6875762" y="3227395"/>
+                  </a:lnTo>
+                  <a:lnTo>
+                    <a:pt x="6947385" y="3233104"/>
+                  </a:lnTo>
+                  <a:lnTo>
+                    <a:pt x="7019007" y="3238687"/>
+                  </a:lnTo>
+                  <a:lnTo>
+                    <a:pt x="7090630" y="3244145"/>
+                  </a:lnTo>
+                  <a:lnTo>
+                    <a:pt x="7090630" y="3476809"/>
+                  </a:lnTo>
+                  <a:lnTo>
+                    <a:pt x="7019007" y="3476180"/>
+                  </a:lnTo>
+                  <a:lnTo>
+                    <a:pt x="6947385" y="3475495"/>
+                  </a:lnTo>
+                  <a:lnTo>
+                    <a:pt x="6875762" y="3474747"/>
+                  </a:lnTo>
+                  <a:lnTo>
+                    <a:pt x="6804139" y="3473931"/>
+                  </a:lnTo>
+                  <a:lnTo>
+                    <a:pt x="6732517" y="3473041"/>
+                  </a:lnTo>
+                  <a:lnTo>
+                    <a:pt x="6660894" y="3472071"/>
+                  </a:lnTo>
+                  <a:lnTo>
+                    <a:pt x="6589272" y="3471012"/>
+                  </a:lnTo>
+                  <a:lnTo>
+                    <a:pt x="6517649" y="3469858"/>
+                  </a:lnTo>
+                  <a:lnTo>
+                    <a:pt x="6446027" y="3468599"/>
+                  </a:lnTo>
+                  <a:lnTo>
+                    <a:pt x="6374404" y="3467226"/>
+                  </a:lnTo>
+                  <a:lnTo>
+                    <a:pt x="6302782" y="3465728"/>
+                  </a:lnTo>
+                  <a:lnTo>
+                    <a:pt x="6231159" y="3464095"/>
+                  </a:lnTo>
+                  <a:lnTo>
+                    <a:pt x="6159537" y="3462314"/>
+                  </a:lnTo>
+                  <a:lnTo>
+                    <a:pt x="6087914" y="3460371"/>
+                  </a:lnTo>
+                  <a:lnTo>
+                    <a:pt x="6016292" y="3458252"/>
+                  </a:lnTo>
+                  <a:lnTo>
+                    <a:pt x="5944669" y="3455941"/>
+                  </a:lnTo>
+                  <a:lnTo>
+                    <a:pt x="5873047" y="3453421"/>
+                  </a:lnTo>
+                  <a:lnTo>
+                    <a:pt x="5801424" y="3450672"/>
+                  </a:lnTo>
+                  <a:lnTo>
+                    <a:pt x="5729802" y="3447674"/>
+                  </a:lnTo>
+                  <a:lnTo>
+                    <a:pt x="5658179" y="3444404"/>
+                  </a:lnTo>
+                  <a:lnTo>
+                    <a:pt x="5586557" y="3440838"/>
+                  </a:lnTo>
+                  <a:lnTo>
+                    <a:pt x="5514934" y="3436949"/>
+                  </a:lnTo>
+                  <a:lnTo>
+                    <a:pt x="5443311" y="3432707"/>
+                  </a:lnTo>
+                  <a:lnTo>
+                    <a:pt x="5371689" y="3428080"/>
+                  </a:lnTo>
+                  <a:lnTo>
+                    <a:pt x="5300066" y="3423034"/>
+                  </a:lnTo>
+                  <a:lnTo>
+                    <a:pt x="5228444" y="3417531"/>
+                  </a:lnTo>
+                  <a:lnTo>
+                    <a:pt x="5156821" y="3411529"/>
+                  </a:lnTo>
+                  <a:lnTo>
+                    <a:pt x="5085199" y="3404982"/>
+                  </a:lnTo>
+                  <a:lnTo>
+                    <a:pt x="5013576" y="3397843"/>
+                  </a:lnTo>
+                  <a:lnTo>
+                    <a:pt x="4941954" y="3390056"/>
+                  </a:lnTo>
+                  <a:lnTo>
+                    <a:pt x="4870331" y="3381563"/>
+                  </a:lnTo>
+                  <a:lnTo>
+                    <a:pt x="4798709" y="3372301"/>
+                  </a:lnTo>
+                  <a:lnTo>
+                    <a:pt x="4727086" y="3362199"/>
+                  </a:lnTo>
+                  <a:lnTo>
+                    <a:pt x="4655464" y="3351181"/>
+                  </a:lnTo>
+                  <a:lnTo>
+                    <a:pt x="4583841" y="3339165"/>
+                  </a:lnTo>
+                  <a:lnTo>
+                    <a:pt x="4512219" y="3326059"/>
+                  </a:lnTo>
+                  <a:lnTo>
+                    <a:pt x="4440596" y="3311765"/>
+                  </a:lnTo>
+                  <a:lnTo>
+                    <a:pt x="4368974" y="3296176"/>
+                  </a:lnTo>
+                  <a:lnTo>
+                    <a:pt x="4297351" y="3279174"/>
+                  </a:lnTo>
+                  <a:lnTo>
+                    <a:pt x="4225729" y="3260630"/>
+                  </a:lnTo>
+                  <a:lnTo>
+                    <a:pt x="4154106" y="3240406"/>
+                  </a:lnTo>
+                  <a:lnTo>
+                    <a:pt x="4082483" y="3218348"/>
+                  </a:lnTo>
+                  <a:lnTo>
+                    <a:pt x="4010861" y="3194291"/>
+                  </a:lnTo>
+                  <a:lnTo>
+                    <a:pt x="3939238" y="3168053"/>
+                  </a:lnTo>
+                  <a:lnTo>
+                    <a:pt x="3867616" y="3139437"/>
+                  </a:lnTo>
+                  <a:lnTo>
+                    <a:pt x="3795993" y="3108227"/>
+                  </a:lnTo>
+                  <a:lnTo>
+                    <a:pt x="3724371" y="3074187"/>
+                  </a:lnTo>
+                  <a:lnTo>
+                    <a:pt x="3652748" y="3037063"/>
+                  </a:lnTo>
+                  <a:lnTo>
+                    <a:pt x="3581126" y="2996573"/>
+                  </a:lnTo>
+                  <a:lnTo>
+                    <a:pt x="3509503" y="2952413"/>
+                  </a:lnTo>
+                  <a:lnTo>
+                    <a:pt x="3437881" y="2904250"/>
+                  </a:lnTo>
+                  <a:lnTo>
+                    <a:pt x="3366258" y="2851721"/>
+                  </a:lnTo>
+                  <a:lnTo>
+                    <a:pt x="3294636" y="2794431"/>
+                  </a:lnTo>
+                  <a:lnTo>
+                    <a:pt x="3223013" y="2731947"/>
+                  </a:lnTo>
+                  <a:lnTo>
+                    <a:pt x="3151391" y="2663800"/>
+                  </a:lnTo>
+                  <a:lnTo>
+                    <a:pt x="3079768" y="2637926"/>
+                  </a:lnTo>
+                  <a:lnTo>
+                    <a:pt x="3008146" y="2618659"/>
+                  </a:lnTo>
+                  <a:lnTo>
+                    <a:pt x="2936523" y="2598952"/>
+                  </a:lnTo>
+                  <a:lnTo>
+                    <a:pt x="2864901" y="2578797"/>
+                  </a:lnTo>
+                  <a:lnTo>
+                    <a:pt x="2793278" y="2558183"/>
+                  </a:lnTo>
+                  <a:lnTo>
+                    <a:pt x="2721655" y="2537100"/>
+                  </a:lnTo>
+                  <a:lnTo>
+                    <a:pt x="2650033" y="2515536"/>
+                  </a:lnTo>
+                  <a:lnTo>
+                    <a:pt x="2578410" y="2493481"/>
+                  </a:lnTo>
+                  <a:lnTo>
+                    <a:pt x="2506788" y="2470923"/>
+                  </a:lnTo>
+                  <a:lnTo>
+                    <a:pt x="2435165" y="2447852"/>
+                  </a:lnTo>
+                  <a:lnTo>
+                    <a:pt x="2363543" y="2424255"/>
+                  </a:lnTo>
+                  <a:lnTo>
+                    <a:pt x="2291920" y="2400120"/>
+                  </a:lnTo>
+                  <a:lnTo>
+                    <a:pt x="2220298" y="2375436"/>
+                  </a:lnTo>
+                  <a:lnTo>
+                    <a:pt x="2148675" y="2350189"/>
+                  </a:lnTo>
+                  <a:lnTo>
+                    <a:pt x="2077053" y="2324368"/>
+                  </a:lnTo>
+                  <a:lnTo>
+                    <a:pt x="2005430" y="2297958"/>
+                  </a:lnTo>
+                  <a:lnTo>
+                    <a:pt x="1933808" y="2270946"/>
+                  </a:lnTo>
+                  <a:lnTo>
+                    <a:pt x="1862185" y="2243320"/>
+                  </a:lnTo>
+                  <a:lnTo>
+                    <a:pt x="1790563" y="2215063"/>
+                  </a:lnTo>
+                  <a:lnTo>
+                    <a:pt x="1718940" y="2186164"/>
+                  </a:lnTo>
+                  <a:lnTo>
+                    <a:pt x="1647318" y="2156606"/>
+                  </a:lnTo>
+                  <a:lnTo>
+                    <a:pt x="1575695" y="2126374"/>
+                  </a:lnTo>
+                  <a:lnTo>
+                    <a:pt x="1504073" y="2095454"/>
+                  </a:lnTo>
+                  <a:lnTo>
+                    <a:pt x="1432450" y="2063830"/>
+                  </a:lnTo>
+                  <a:lnTo>
+                    <a:pt x="1360827" y="2031485"/>
+                  </a:lnTo>
+                  <a:lnTo>
+                    <a:pt x="1289205" y="1998404"/>
+                  </a:lnTo>
+                  <a:lnTo>
+                    <a:pt x="1217582" y="1964569"/>
+                  </a:lnTo>
+                  <a:lnTo>
+                    <a:pt x="1145960" y="1929963"/>
+                  </a:lnTo>
+                  <a:lnTo>
+                    <a:pt x="1074337" y="1894569"/>
+                  </a:lnTo>
+                  <a:lnTo>
+                    <a:pt x="1002715" y="1858368"/>
+                  </a:lnTo>
+                  <a:lnTo>
+                    <a:pt x="931092" y="1821343"/>
+                  </a:lnTo>
+                  <a:lnTo>
+                    <a:pt x="859470" y="1783475"/>
+                  </a:lnTo>
+                  <a:lnTo>
+                    <a:pt x="787847" y="1744744"/>
+                  </a:lnTo>
+                  <a:lnTo>
+                    <a:pt x="716225" y="1705131"/>
+                  </a:lnTo>
+                  <a:lnTo>
+                    <a:pt x="644602" y="1664615"/>
+                  </a:lnTo>
+                  <a:lnTo>
+                    <a:pt x="572980" y="1623176"/>
+                  </a:lnTo>
+                  <a:lnTo>
+                    <a:pt x="501357" y="1580794"/>
+                  </a:lnTo>
+                  <a:lnTo>
+                    <a:pt x="429735" y="1537446"/>
+                  </a:lnTo>
+                  <a:lnTo>
+                    <a:pt x="358112" y="1493111"/>
+                  </a:lnTo>
+                  <a:lnTo>
+                    <a:pt x="286490" y="1447765"/>
+                  </a:lnTo>
+                  <a:lnTo>
+                    <a:pt x="214867" y="1401387"/>
+                  </a:lnTo>
+                  <a:lnTo>
+                    <a:pt x="143245" y="1353952"/>
+                  </a:lnTo>
+                  <a:lnTo>
+                    <a:pt x="71622" y="1305437"/>
+                  </a:lnTo>
+                  <a:lnTo>
+                    <a:pt x="0" y="1255817"/>
+                  </a:lnTo>
+                  <a:lnTo>
+                    <a:pt x="0" y="0"/>
                   </a:lnTo>
                   <a:close/>
                 </a:path>
@@ -3945,237 +3942,231 @@
           </p:nvSpPr>
           <p:spPr>
             <a:xfrm>
-              <a:off x="3023705" y="2073503"/>
-              <a:ext cx="5238974" cy="3210621"/>
+              <a:off x="3130038" y="2073503"/>
+              <a:ext cx="5132641" cy="3244145"/>
             </a:xfrm>
             <a:custGeom>
               <a:avLst/>
               <a:pathLst>
-                <a:path w="5238974" h="3210621">
+                <a:path w="5132641" h="3244145">
                   <a:moveTo>
                     <a:pt x="0" y="0"/>
                   </a:moveTo>
                   <a:lnTo>
-                    <a:pt x="10529" y="41956"/>
-                  </a:lnTo>
-                  <a:lnTo>
-                    <a:pt x="82152" y="305486"/>
-                  </a:lnTo>
-                  <a:lnTo>
-                    <a:pt x="153774" y="548839"/>
-                  </a:lnTo>
-                  <a:lnTo>
-                    <a:pt x="225397" y="773559"/>
-                  </a:lnTo>
-                  <a:lnTo>
-                    <a:pt x="297019" y="981072"/>
-                  </a:lnTo>
-                  <a:lnTo>
-                    <a:pt x="368642" y="1172697"/>
-                  </a:lnTo>
-                  <a:lnTo>
-                    <a:pt x="440264" y="1349649"/>
-                  </a:lnTo>
-                  <a:lnTo>
-                    <a:pt x="511887" y="1513052"/>
-                  </a:lnTo>
-                  <a:lnTo>
-                    <a:pt x="583510" y="1663944"/>
-                  </a:lnTo>
-                  <a:lnTo>
-                    <a:pt x="655132" y="1803282"/>
-                  </a:lnTo>
-                  <a:lnTo>
-                    <a:pt x="726755" y="1931952"/>
-                  </a:lnTo>
-                  <a:lnTo>
-                    <a:pt x="798377" y="2050769"/>
-                  </a:lnTo>
-                  <a:lnTo>
-                    <a:pt x="870000" y="2160489"/>
-                  </a:lnTo>
-                  <a:lnTo>
-                    <a:pt x="941622" y="2261808"/>
-                  </a:lnTo>
-                  <a:lnTo>
-                    <a:pt x="1013245" y="2355370"/>
-                  </a:lnTo>
-                  <a:lnTo>
-                    <a:pt x="1084867" y="2441767"/>
-                  </a:lnTo>
-                  <a:lnTo>
-                    <a:pt x="1156490" y="2521549"/>
-                  </a:lnTo>
-                  <a:lnTo>
-                    <a:pt x="1228112" y="2595223"/>
-                  </a:lnTo>
-                  <a:lnTo>
-                    <a:pt x="1299735" y="2656561"/>
-                  </a:lnTo>
-                  <a:lnTo>
-                    <a:pt x="1371357" y="2673060"/>
-                  </a:lnTo>
-                  <a:lnTo>
-                    <a:pt x="1442980" y="2689230"/>
-                  </a:lnTo>
-                  <a:lnTo>
-                    <a:pt x="1514602" y="2705077"/>
-                  </a:lnTo>
-                  <a:lnTo>
-                    <a:pt x="1586225" y="2720608"/>
-                  </a:lnTo>
-                  <a:lnTo>
-                    <a:pt x="1657847" y="2735829"/>
-                  </a:lnTo>
-                  <a:lnTo>
-                    <a:pt x="1729470" y="2750747"/>
-                  </a:lnTo>
-                  <a:lnTo>
-                    <a:pt x="1801092" y="2765367"/>
-                  </a:lnTo>
-                  <a:lnTo>
-                    <a:pt x="1872715" y="2779696"/>
-                  </a:lnTo>
-                  <a:lnTo>
-                    <a:pt x="1944338" y="2793738"/>
-                  </a:lnTo>
-                  <a:lnTo>
-                    <a:pt x="2015960" y="2807501"/>
-                  </a:lnTo>
-                  <a:lnTo>
-                    <a:pt x="2087583" y="2820989"/>
-                  </a:lnTo>
-                  <a:lnTo>
-                    <a:pt x="2159205" y="2834208"/>
-                  </a:lnTo>
-                  <a:lnTo>
-                    <a:pt x="2230828" y="2847164"/>
-                  </a:lnTo>
-                  <a:lnTo>
-                    <a:pt x="2302450" y="2859861"/>
-                  </a:lnTo>
-                  <a:lnTo>
-                    <a:pt x="2374073" y="2872305"/>
-                  </a:lnTo>
-                  <a:lnTo>
-                    <a:pt x="2445695" y="2884500"/>
-                  </a:lnTo>
-                  <a:lnTo>
-                    <a:pt x="2517318" y="2896453"/>
-                  </a:lnTo>
-                  <a:lnTo>
-                    <a:pt x="2588940" y="2908167"/>
-                  </a:lnTo>
-                  <a:lnTo>
-                    <a:pt x="2660563" y="2919647"/>
-                  </a:lnTo>
-                  <a:lnTo>
-                    <a:pt x="2732185" y="2930898"/>
-                  </a:lnTo>
-                  <a:lnTo>
-                    <a:pt x="2803808" y="2941925"/>
-                  </a:lnTo>
-                  <a:lnTo>
-                    <a:pt x="2875430" y="2952732"/>
-                  </a:lnTo>
-                  <a:lnTo>
-                    <a:pt x="2947053" y="2963324"/>
-                  </a:lnTo>
-                  <a:lnTo>
-                    <a:pt x="3018675" y="2973704"/>
-                  </a:lnTo>
-                  <a:lnTo>
-                    <a:pt x="3090298" y="2983877"/>
-                  </a:lnTo>
-                  <a:lnTo>
-                    <a:pt x="3161920" y="2993847"/>
-                  </a:lnTo>
-                  <a:lnTo>
-                    <a:pt x="3233543" y="3003618"/>
-                  </a:lnTo>
-                  <a:lnTo>
-                    <a:pt x="3305166" y="3013195"/>
-                  </a:lnTo>
-                  <a:lnTo>
-                    <a:pt x="3376788" y="3022580"/>
-                  </a:lnTo>
-                  <a:lnTo>
-                    <a:pt x="3448411" y="3031779"/>
-                  </a:lnTo>
-                  <a:lnTo>
-                    <a:pt x="3520033" y="3040793"/>
-                  </a:lnTo>
-                  <a:lnTo>
-                    <a:pt x="3591656" y="3049628"/>
-                  </a:lnTo>
-                  <a:lnTo>
-                    <a:pt x="3663278" y="3058287"/>
-                  </a:lnTo>
-                  <a:lnTo>
-                    <a:pt x="3734901" y="3066773"/>
-                  </a:lnTo>
-                  <a:lnTo>
-                    <a:pt x="3806523" y="3075090"/>
-                  </a:lnTo>
-                  <a:lnTo>
-                    <a:pt x="3878146" y="3083241"/>
-                  </a:lnTo>
-                  <a:lnTo>
-                    <a:pt x="3949768" y="3091229"/>
-                  </a:lnTo>
-                  <a:lnTo>
-                    <a:pt x="4021391" y="3099058"/>
-                  </a:lnTo>
-                  <a:lnTo>
-                    <a:pt x="4093013" y="3106731"/>
-                  </a:lnTo>
-                  <a:lnTo>
-                    <a:pt x="4164636" y="3114251"/>
-                  </a:lnTo>
-                  <a:lnTo>
-                    <a:pt x="4236258" y="3121621"/>
-                  </a:lnTo>
-                  <a:lnTo>
-                    <a:pt x="4307881" y="3128844"/>
-                  </a:lnTo>
-                  <a:lnTo>
-                    <a:pt x="4379503" y="3135922"/>
-                  </a:lnTo>
-                  <a:lnTo>
-                    <a:pt x="4451126" y="3142860"/>
-                  </a:lnTo>
-                  <a:lnTo>
-                    <a:pt x="4522748" y="3149659"/>
-                  </a:lnTo>
-                  <a:lnTo>
-                    <a:pt x="4594371" y="3156323"/>
-                  </a:lnTo>
-                  <a:lnTo>
-                    <a:pt x="4665994" y="3162853"/>
-                  </a:lnTo>
-                  <a:lnTo>
-                    <a:pt x="4737616" y="3169254"/>
-                  </a:lnTo>
-                  <a:lnTo>
-                    <a:pt x="4809239" y="3175527"/>
-                  </a:lnTo>
-                  <a:lnTo>
-                    <a:pt x="4880861" y="3181674"/>
-                  </a:lnTo>
-                  <a:lnTo>
-                    <a:pt x="4952484" y="3187699"/>
-                  </a:lnTo>
-                  <a:lnTo>
-                    <a:pt x="5024106" y="3193604"/>
-                  </a:lnTo>
-                  <a:lnTo>
-                    <a:pt x="5095729" y="3199391"/>
-                  </a:lnTo>
-                  <a:lnTo>
-                    <a:pt x="5167351" y="3205063"/>
-                  </a:lnTo>
-                  <a:lnTo>
-                    <a:pt x="5238974" y="3210621"/>
+                    <a:pt x="47442" y="197325"/>
+                  </a:lnTo>
+                  <a:lnTo>
+                    <a:pt x="119064" y="470465"/>
+                  </a:lnTo>
+                  <a:lnTo>
+                    <a:pt x="190687" y="720905"/>
+                  </a:lnTo>
+                  <a:lnTo>
+                    <a:pt x="262309" y="950529"/>
+                  </a:lnTo>
+                  <a:lnTo>
+                    <a:pt x="333932" y="1161070"/>
+                  </a:lnTo>
+                  <a:lnTo>
+                    <a:pt x="405554" y="1354111"/>
+                  </a:lnTo>
+                  <a:lnTo>
+                    <a:pt x="477177" y="1531109"/>
+                  </a:lnTo>
+                  <a:lnTo>
+                    <a:pt x="548799" y="1693396"/>
+                  </a:lnTo>
+                  <a:lnTo>
+                    <a:pt x="620422" y="1842196"/>
+                  </a:lnTo>
+                  <a:lnTo>
+                    <a:pt x="692044" y="1978628"/>
+                  </a:lnTo>
+                  <a:lnTo>
+                    <a:pt x="763667" y="2103721"/>
+                  </a:lnTo>
+                  <a:lnTo>
+                    <a:pt x="835289" y="2218417"/>
+                  </a:lnTo>
+                  <a:lnTo>
+                    <a:pt x="906912" y="2323581"/>
+                  </a:lnTo>
+                  <a:lnTo>
+                    <a:pt x="978534" y="2420005"/>
+                  </a:lnTo>
+                  <a:lnTo>
+                    <a:pt x="1050157" y="2508414"/>
+                  </a:lnTo>
+                  <a:lnTo>
+                    <a:pt x="1121779" y="2589476"/>
+                  </a:lnTo>
+                  <a:lnTo>
+                    <a:pt x="1193402" y="2656764"/>
+                  </a:lnTo>
+                  <a:lnTo>
+                    <a:pt x="1265024" y="2675182"/>
+                  </a:lnTo>
+                  <a:lnTo>
+                    <a:pt x="1336647" y="2693191"/>
+                  </a:lnTo>
+                  <a:lnTo>
+                    <a:pt x="1408270" y="2710798"/>
+                  </a:lnTo>
+                  <a:lnTo>
+                    <a:pt x="1479892" y="2728013"/>
+                  </a:lnTo>
+                  <a:lnTo>
+                    <a:pt x="1551515" y="2744845"/>
+                  </a:lnTo>
+                  <a:lnTo>
+                    <a:pt x="1623137" y="2761302"/>
+                  </a:lnTo>
+                  <a:lnTo>
+                    <a:pt x="1694760" y="2777392"/>
+                  </a:lnTo>
+                  <a:lnTo>
+                    <a:pt x="1766382" y="2793124"/>
+                  </a:lnTo>
+                  <a:lnTo>
+                    <a:pt x="1838005" y="2808505"/>
+                  </a:lnTo>
+                  <a:lnTo>
+                    <a:pt x="1909627" y="2823544"/>
+                  </a:lnTo>
+                  <a:lnTo>
+                    <a:pt x="1981250" y="2838248"/>
+                  </a:lnTo>
+                  <a:lnTo>
+                    <a:pt x="2052872" y="2852625"/>
+                  </a:lnTo>
+                  <a:lnTo>
+                    <a:pt x="2124495" y="2866681"/>
+                  </a:lnTo>
+                  <a:lnTo>
+                    <a:pt x="2196117" y="2880424"/>
+                  </a:lnTo>
+                  <a:lnTo>
+                    <a:pt x="2267740" y="2893862"/>
+                  </a:lnTo>
+                  <a:lnTo>
+                    <a:pt x="2339362" y="2906999"/>
+                  </a:lnTo>
+                  <a:lnTo>
+                    <a:pt x="2410985" y="2919845"/>
+                  </a:lnTo>
+                  <a:lnTo>
+                    <a:pt x="2482607" y="2932404"/>
+                  </a:lnTo>
+                  <a:lnTo>
+                    <a:pt x="2554230" y="2944683"/>
+                  </a:lnTo>
+                  <a:lnTo>
+                    <a:pt x="2625852" y="2956689"/>
+                  </a:lnTo>
+                  <a:lnTo>
+                    <a:pt x="2697475" y="2968428"/>
+                  </a:lnTo>
+                  <a:lnTo>
+                    <a:pt x="2769098" y="2979905"/>
+                  </a:lnTo>
+                  <a:lnTo>
+                    <a:pt x="2840720" y="2991127"/>
+                  </a:lnTo>
+                  <a:lnTo>
+                    <a:pt x="2912343" y="3002098"/>
+                  </a:lnTo>
+                  <a:lnTo>
+                    <a:pt x="2983965" y="3012826"/>
+                  </a:lnTo>
+                  <a:lnTo>
+                    <a:pt x="3055588" y="3023314"/>
+                  </a:lnTo>
+                  <a:lnTo>
+                    <a:pt x="3127210" y="3033569"/>
+                  </a:lnTo>
+                  <a:lnTo>
+                    <a:pt x="3198833" y="3043595"/>
+                  </a:lnTo>
+                  <a:lnTo>
+                    <a:pt x="3270455" y="3053398"/>
+                  </a:lnTo>
+                  <a:lnTo>
+                    <a:pt x="3342078" y="3062983"/>
+                  </a:lnTo>
+                  <a:lnTo>
+                    <a:pt x="3413700" y="3072354"/>
+                  </a:lnTo>
+                  <a:lnTo>
+                    <a:pt x="3485323" y="3081516"/>
+                  </a:lnTo>
+                  <a:lnTo>
+                    <a:pt x="3556945" y="3090475"/>
+                  </a:lnTo>
+                  <a:lnTo>
+                    <a:pt x="3628568" y="3099234"/>
+                  </a:lnTo>
+                  <a:lnTo>
+                    <a:pt x="3700190" y="3107798"/>
+                  </a:lnTo>
+                  <a:lnTo>
+                    <a:pt x="3771813" y="3116171"/>
+                  </a:lnTo>
+                  <a:lnTo>
+                    <a:pt x="3843435" y="3124357"/>
+                  </a:lnTo>
+                  <a:lnTo>
+                    <a:pt x="3915058" y="3132362"/>
+                  </a:lnTo>
+                  <a:lnTo>
+                    <a:pt x="3986680" y="3140188"/>
+                  </a:lnTo>
+                  <a:lnTo>
+                    <a:pt x="4058303" y="3147840"/>
+                  </a:lnTo>
+                  <a:lnTo>
+                    <a:pt x="4129926" y="3155321"/>
+                  </a:lnTo>
+                  <a:lnTo>
+                    <a:pt x="4201548" y="3162636"/>
+                  </a:lnTo>
+                  <a:lnTo>
+                    <a:pt x="4273171" y="3169787"/>
+                  </a:lnTo>
+                  <a:lnTo>
+                    <a:pt x="4344793" y="3176780"/>
+                  </a:lnTo>
+                  <a:lnTo>
+                    <a:pt x="4416416" y="3183617"/>
+                  </a:lnTo>
+                  <a:lnTo>
+                    <a:pt x="4488038" y="3190301"/>
+                  </a:lnTo>
+                  <a:lnTo>
+                    <a:pt x="4559661" y="3196837"/>
+                  </a:lnTo>
+                  <a:lnTo>
+                    <a:pt x="4631283" y="3203227"/>
+                  </a:lnTo>
+                  <a:lnTo>
+                    <a:pt x="4702906" y="3209474"/>
+                  </a:lnTo>
+                  <a:lnTo>
+                    <a:pt x="4774528" y="3215583"/>
+                  </a:lnTo>
+                  <a:lnTo>
+                    <a:pt x="4846151" y="3221556"/>
+                  </a:lnTo>
+                  <a:lnTo>
+                    <a:pt x="4917773" y="3227395"/>
+                  </a:lnTo>
+                  <a:lnTo>
+                    <a:pt x="4989396" y="3233104"/>
+                  </a:lnTo>
+                  <a:lnTo>
+                    <a:pt x="5061018" y="3238687"/>
+                  </a:lnTo>
+                  <a:lnTo>
+                    <a:pt x="5132641" y="3244145"/>
                   </a:lnTo>
                 </a:path>
               </a:pathLst>
@@ -4195,309 +4186,309 @@
           </p:nvSpPr>
           <p:spPr>
             <a:xfrm>
-              <a:off x="1172049" y="3550026"/>
-              <a:ext cx="7090630" cy="1996958"/>
+              <a:off x="1172049" y="3329320"/>
+              <a:ext cx="7090630" cy="2220992"/>
             </a:xfrm>
             <a:custGeom>
               <a:avLst/>
               <a:pathLst>
-                <a:path w="7090630" h="1996958">
+                <a:path w="7090630" h="2220992">
                   <a:moveTo>
-                    <a:pt x="7090630" y="1996958"/>
+                    <a:pt x="7090630" y="2220992"/>
                   </a:moveTo>
                   <a:lnTo>
-                    <a:pt x="7019007" y="1996107"/>
-                  </a:lnTo>
-                  <a:lnTo>
-                    <a:pt x="6947385" y="1995185"/>
-                  </a:lnTo>
-                  <a:lnTo>
-                    <a:pt x="6875762" y="1994187"/>
-                  </a:lnTo>
-                  <a:lnTo>
-                    <a:pt x="6804139" y="1993106"/>
-                  </a:lnTo>
-                  <a:lnTo>
-                    <a:pt x="6732517" y="1991936"/>
-                  </a:lnTo>
-                  <a:lnTo>
-                    <a:pt x="6660894" y="1990668"/>
-                  </a:lnTo>
-                  <a:lnTo>
-                    <a:pt x="6589272" y="1989295"/>
-                  </a:lnTo>
-                  <a:lnTo>
-                    <a:pt x="6517649" y="1987809"/>
-                  </a:lnTo>
-                  <a:lnTo>
-                    <a:pt x="6446027" y="1986199"/>
-                  </a:lnTo>
-                  <a:lnTo>
-                    <a:pt x="6374404" y="1984456"/>
-                  </a:lnTo>
-                  <a:lnTo>
-                    <a:pt x="6302782" y="1982568"/>
-                  </a:lnTo>
-                  <a:lnTo>
-                    <a:pt x="6231159" y="1980524"/>
-                  </a:lnTo>
-                  <a:lnTo>
-                    <a:pt x="6159537" y="1978310"/>
-                  </a:lnTo>
-                  <a:lnTo>
-                    <a:pt x="6087914" y="1975913"/>
-                  </a:lnTo>
-                  <a:lnTo>
-                    <a:pt x="6016292" y="1973317"/>
-                  </a:lnTo>
-                  <a:lnTo>
-                    <a:pt x="5944669" y="1970506"/>
-                  </a:lnTo>
-                  <a:lnTo>
-                    <a:pt x="5873047" y="1967461"/>
-                  </a:lnTo>
-                  <a:lnTo>
-                    <a:pt x="5801424" y="1964164"/>
-                  </a:lnTo>
-                  <a:lnTo>
-                    <a:pt x="5729802" y="1960594"/>
-                  </a:lnTo>
-                  <a:lnTo>
-                    <a:pt x="5658179" y="1956728"/>
-                  </a:lnTo>
-                  <a:lnTo>
-                    <a:pt x="5586557" y="1952541"/>
-                  </a:lnTo>
-                  <a:lnTo>
-                    <a:pt x="5514934" y="1948007"/>
-                  </a:lnTo>
-                  <a:lnTo>
-                    <a:pt x="5443311" y="1943097"/>
-                  </a:lnTo>
-                  <a:lnTo>
-                    <a:pt x="5371689" y="1937780"/>
-                  </a:lnTo>
-                  <a:lnTo>
-                    <a:pt x="5300066" y="1932022"/>
-                  </a:lnTo>
-                  <a:lnTo>
-                    <a:pt x="5228444" y="1925786"/>
-                  </a:lnTo>
-                  <a:lnTo>
-                    <a:pt x="5156821" y="1919034"/>
-                  </a:lnTo>
-                  <a:lnTo>
-                    <a:pt x="5085199" y="1911721"/>
-                  </a:lnTo>
-                  <a:lnTo>
-                    <a:pt x="5013576" y="1903803"/>
-                  </a:lnTo>
-                  <a:lnTo>
-                    <a:pt x="4941954" y="1895228"/>
-                  </a:lnTo>
-                  <a:lnTo>
-                    <a:pt x="4870331" y="1885941"/>
-                  </a:lnTo>
-                  <a:lnTo>
-                    <a:pt x="4798709" y="1875885"/>
-                  </a:lnTo>
-                  <a:lnTo>
-                    <a:pt x="4727086" y="1864995"/>
-                  </a:lnTo>
-                  <a:lnTo>
-                    <a:pt x="4655464" y="1853202"/>
-                  </a:lnTo>
-                  <a:lnTo>
-                    <a:pt x="4583841" y="1840431"/>
-                  </a:lnTo>
-                  <a:lnTo>
-                    <a:pt x="4512219" y="1826601"/>
-                  </a:lnTo>
-                  <a:lnTo>
-                    <a:pt x="4440596" y="1811625"/>
-                  </a:lnTo>
-                  <a:lnTo>
-                    <a:pt x="4368974" y="1795407"/>
-                  </a:lnTo>
-                  <a:lnTo>
-                    <a:pt x="4297351" y="1777844"/>
-                  </a:lnTo>
-                  <a:lnTo>
-                    <a:pt x="4225729" y="1758824"/>
-                  </a:lnTo>
-                  <a:lnTo>
-                    <a:pt x="4154106" y="1738228"/>
-                  </a:lnTo>
-                  <a:lnTo>
-                    <a:pt x="4082483" y="1715924"/>
-                  </a:lnTo>
-                  <a:lnTo>
-                    <a:pt x="4010861" y="1691770"/>
-                  </a:lnTo>
-                  <a:lnTo>
-                    <a:pt x="3939238" y="1665614"/>
-                  </a:lnTo>
-                  <a:lnTo>
-                    <a:pt x="3867616" y="1637289"/>
-                  </a:lnTo>
-                  <a:lnTo>
-                    <a:pt x="3795993" y="1606615"/>
-                  </a:lnTo>
-                  <a:lnTo>
-                    <a:pt x="3724371" y="1573398"/>
-                  </a:lnTo>
-                  <a:lnTo>
-                    <a:pt x="3652748" y="1537427"/>
-                  </a:lnTo>
-                  <a:lnTo>
-                    <a:pt x="3581126" y="1498473"/>
-                  </a:lnTo>
-                  <a:lnTo>
-                    <a:pt x="3509503" y="1456289"/>
-                  </a:lnTo>
-                  <a:lnTo>
-                    <a:pt x="3437881" y="1410608"/>
-                  </a:lnTo>
-                  <a:lnTo>
-                    <a:pt x="3366258" y="1361139"/>
-                  </a:lnTo>
-                  <a:lnTo>
-                    <a:pt x="3294636" y="1307568"/>
-                  </a:lnTo>
-                  <a:lnTo>
-                    <a:pt x="3223013" y="1249554"/>
-                  </a:lnTo>
-                  <a:lnTo>
-                    <a:pt x="3151391" y="1186731"/>
-                  </a:lnTo>
-                  <a:lnTo>
-                    <a:pt x="3079768" y="1163203"/>
-                  </a:lnTo>
-                  <a:lnTo>
-                    <a:pt x="3008146" y="1146026"/>
-                  </a:lnTo>
-                  <a:lnTo>
-                    <a:pt x="2936523" y="1128499"/>
-                  </a:lnTo>
-                  <a:lnTo>
-                    <a:pt x="2864901" y="1110616"/>
-                  </a:lnTo>
-                  <a:lnTo>
-                    <a:pt x="2793278" y="1092368"/>
-                  </a:lnTo>
-                  <a:lnTo>
-                    <a:pt x="2721655" y="1073750"/>
-                  </a:lnTo>
-                  <a:lnTo>
-                    <a:pt x="2650033" y="1054752"/>
-                  </a:lnTo>
-                  <a:lnTo>
-                    <a:pt x="2578410" y="1035368"/>
-                  </a:lnTo>
-                  <a:lnTo>
-                    <a:pt x="2506788" y="1015589"/>
-                  </a:lnTo>
-                  <a:lnTo>
-                    <a:pt x="2435165" y="995408"/>
-                  </a:lnTo>
-                  <a:lnTo>
-                    <a:pt x="2363543" y="974816"/>
-                  </a:lnTo>
-                  <a:lnTo>
-                    <a:pt x="2291920" y="953805"/>
-                  </a:lnTo>
-                  <a:lnTo>
-                    <a:pt x="2220298" y="932366"/>
-                  </a:lnTo>
-                  <a:lnTo>
-                    <a:pt x="2148675" y="910491"/>
-                  </a:lnTo>
-                  <a:lnTo>
-                    <a:pt x="2077053" y="888171"/>
-                  </a:lnTo>
-                  <a:lnTo>
-                    <a:pt x="2005430" y="865396"/>
-                  </a:lnTo>
-                  <a:lnTo>
-                    <a:pt x="1933808" y="842158"/>
-                  </a:lnTo>
-                  <a:lnTo>
-                    <a:pt x="1862185" y="818447"/>
-                  </a:lnTo>
-                  <a:lnTo>
-                    <a:pt x="1790563" y="794254"/>
-                  </a:lnTo>
-                  <a:lnTo>
-                    <a:pt x="1718940" y="769568"/>
-                  </a:lnTo>
-                  <a:lnTo>
-                    <a:pt x="1647318" y="744380"/>
-                  </a:lnTo>
-                  <a:lnTo>
-                    <a:pt x="1575695" y="718679"/>
-                  </a:lnTo>
-                  <a:lnTo>
-                    <a:pt x="1504073" y="692455"/>
-                  </a:lnTo>
-                  <a:lnTo>
-                    <a:pt x="1432450" y="665697"/>
-                  </a:lnTo>
-                  <a:lnTo>
-                    <a:pt x="1360827" y="638395"/>
-                  </a:lnTo>
-                  <a:lnTo>
-                    <a:pt x="1289205" y="610537"/>
-                  </a:lnTo>
-                  <a:lnTo>
-                    <a:pt x="1217582" y="582113"/>
-                  </a:lnTo>
-                  <a:lnTo>
-                    <a:pt x="1145960" y="553109"/>
-                  </a:lnTo>
-                  <a:lnTo>
-                    <a:pt x="1074337" y="523516"/>
-                  </a:lnTo>
-                  <a:lnTo>
-                    <a:pt x="1002715" y="493320"/>
-                  </a:lnTo>
-                  <a:lnTo>
-                    <a:pt x="931092" y="462510"/>
-                  </a:lnTo>
-                  <a:lnTo>
-                    <a:pt x="859470" y="431073"/>
-                  </a:lnTo>
-                  <a:lnTo>
-                    <a:pt x="787847" y="398995"/>
-                  </a:lnTo>
-                  <a:lnTo>
-                    <a:pt x="716225" y="366265"/>
-                  </a:lnTo>
-                  <a:lnTo>
-                    <a:pt x="644602" y="332869"/>
-                  </a:lnTo>
-                  <a:lnTo>
-                    <a:pt x="572980" y="298794"/>
-                  </a:lnTo>
-                  <a:lnTo>
-                    <a:pt x="501357" y="264024"/>
-                  </a:lnTo>
-                  <a:lnTo>
-                    <a:pt x="429735" y="228548"/>
-                  </a:lnTo>
-                  <a:lnTo>
-                    <a:pt x="358112" y="192349"/>
-                  </a:lnTo>
-                  <a:lnTo>
-                    <a:pt x="286490" y="155413"/>
-                  </a:lnTo>
-                  <a:lnTo>
-                    <a:pt x="214867" y="117726"/>
-                  </a:lnTo>
-                  <a:lnTo>
-                    <a:pt x="143245" y="79272"/>
-                  </a:lnTo>
-                  <a:lnTo>
-                    <a:pt x="71622" y="40035"/>
+                    <a:pt x="7019007" y="2220363"/>
+                  </a:lnTo>
+                  <a:lnTo>
+                    <a:pt x="6947385" y="2219677"/>
+                  </a:lnTo>
+                  <a:lnTo>
+                    <a:pt x="6875762" y="2218929"/>
+                  </a:lnTo>
+                  <a:lnTo>
+                    <a:pt x="6804139" y="2218114"/>
+                  </a:lnTo>
+                  <a:lnTo>
+                    <a:pt x="6732517" y="2217224"/>
+                  </a:lnTo>
+                  <a:lnTo>
+                    <a:pt x="6660894" y="2216253"/>
+                  </a:lnTo>
+                  <a:lnTo>
+                    <a:pt x="6589272" y="2215195"/>
+                  </a:lnTo>
+                  <a:lnTo>
+                    <a:pt x="6517649" y="2214041"/>
+                  </a:lnTo>
+                  <a:lnTo>
+                    <a:pt x="6446027" y="2212782"/>
+                  </a:lnTo>
+                  <a:lnTo>
+                    <a:pt x="6374404" y="2211409"/>
+                  </a:lnTo>
+                  <a:lnTo>
+                    <a:pt x="6302782" y="2209911"/>
+                  </a:lnTo>
+                  <a:lnTo>
+                    <a:pt x="6231159" y="2208278"/>
+                  </a:lnTo>
+                  <a:lnTo>
+                    <a:pt x="6159537" y="2206497"/>
+                  </a:lnTo>
+                  <a:lnTo>
+                    <a:pt x="6087914" y="2204554"/>
+                  </a:lnTo>
+                  <a:lnTo>
+                    <a:pt x="6016292" y="2202435"/>
+                  </a:lnTo>
+                  <a:lnTo>
+                    <a:pt x="5944669" y="2200124"/>
+                  </a:lnTo>
+                  <a:lnTo>
+                    <a:pt x="5873047" y="2197604"/>
+                  </a:lnTo>
+                  <a:lnTo>
+                    <a:pt x="5801424" y="2194855"/>
+                  </a:lnTo>
+                  <a:lnTo>
+                    <a:pt x="5729802" y="2191857"/>
+                  </a:lnTo>
+                  <a:lnTo>
+                    <a:pt x="5658179" y="2188587"/>
+                  </a:lnTo>
+                  <a:lnTo>
+                    <a:pt x="5586557" y="2185021"/>
+                  </a:lnTo>
+                  <a:lnTo>
+                    <a:pt x="5514934" y="2181131"/>
+                  </a:lnTo>
+                  <a:lnTo>
+                    <a:pt x="5443311" y="2176889"/>
+                  </a:lnTo>
+                  <a:lnTo>
+                    <a:pt x="5371689" y="2172263"/>
+                  </a:lnTo>
+                  <a:lnTo>
+                    <a:pt x="5300066" y="2167217"/>
+                  </a:lnTo>
+                  <a:lnTo>
+                    <a:pt x="5228444" y="2161714"/>
+                  </a:lnTo>
+                  <a:lnTo>
+                    <a:pt x="5156821" y="2155711"/>
+                  </a:lnTo>
+                  <a:lnTo>
+                    <a:pt x="5085199" y="2149165"/>
+                  </a:lnTo>
+                  <a:lnTo>
+                    <a:pt x="5013576" y="2142026"/>
+                  </a:lnTo>
+                  <a:lnTo>
+                    <a:pt x="4941954" y="2134239"/>
+                  </a:lnTo>
+                  <a:lnTo>
+                    <a:pt x="4870331" y="2125746"/>
+                  </a:lnTo>
+                  <a:lnTo>
+                    <a:pt x="4798709" y="2116484"/>
+                  </a:lnTo>
+                  <a:lnTo>
+                    <a:pt x="4727086" y="2106382"/>
+                  </a:lnTo>
+                  <a:lnTo>
+                    <a:pt x="4655464" y="2095364"/>
+                  </a:lnTo>
+                  <a:lnTo>
+                    <a:pt x="4583841" y="2083348"/>
+                  </a:lnTo>
+                  <a:lnTo>
+                    <a:pt x="4512219" y="2070242"/>
+                  </a:lnTo>
+                  <a:lnTo>
+                    <a:pt x="4440596" y="2055948"/>
+                  </a:lnTo>
+                  <a:lnTo>
+                    <a:pt x="4368974" y="2040359"/>
+                  </a:lnTo>
+                  <a:lnTo>
+                    <a:pt x="4297351" y="2023357"/>
+                  </a:lnTo>
+                  <a:lnTo>
+                    <a:pt x="4225729" y="2004813"/>
+                  </a:lnTo>
+                  <a:lnTo>
+                    <a:pt x="4154106" y="1984589"/>
+                  </a:lnTo>
+                  <a:lnTo>
+                    <a:pt x="4082483" y="1962531"/>
+                  </a:lnTo>
+                  <a:lnTo>
+                    <a:pt x="4010861" y="1938474"/>
+                  </a:lnTo>
+                  <a:lnTo>
+                    <a:pt x="3939238" y="1912236"/>
+                  </a:lnTo>
+                  <a:lnTo>
+                    <a:pt x="3867616" y="1883620"/>
+                  </a:lnTo>
+                  <a:lnTo>
+                    <a:pt x="3795993" y="1852409"/>
+                  </a:lnTo>
+                  <a:lnTo>
+                    <a:pt x="3724371" y="1818370"/>
+                  </a:lnTo>
+                  <a:lnTo>
+                    <a:pt x="3652748" y="1781246"/>
+                  </a:lnTo>
+                  <a:lnTo>
+                    <a:pt x="3581126" y="1740756"/>
+                  </a:lnTo>
+                  <a:lnTo>
+                    <a:pt x="3509503" y="1696596"/>
+                  </a:lnTo>
+                  <a:lnTo>
+                    <a:pt x="3437881" y="1648433"/>
+                  </a:lnTo>
+                  <a:lnTo>
+                    <a:pt x="3366258" y="1595904"/>
+                  </a:lnTo>
+                  <a:lnTo>
+                    <a:pt x="3294636" y="1538614"/>
+                  </a:lnTo>
+                  <a:lnTo>
+                    <a:pt x="3223013" y="1476130"/>
+                  </a:lnTo>
+                  <a:lnTo>
+                    <a:pt x="3151391" y="1407983"/>
+                  </a:lnTo>
+                  <a:lnTo>
+                    <a:pt x="3079768" y="1382109"/>
+                  </a:lnTo>
+                  <a:lnTo>
+                    <a:pt x="3008146" y="1362841"/>
+                  </a:lnTo>
+                  <a:lnTo>
+                    <a:pt x="2936523" y="1343135"/>
+                  </a:lnTo>
+                  <a:lnTo>
+                    <a:pt x="2864901" y="1322980"/>
+                  </a:lnTo>
+                  <a:lnTo>
+                    <a:pt x="2793278" y="1302366"/>
+                  </a:lnTo>
+                  <a:lnTo>
+                    <a:pt x="2721655" y="1281283"/>
+                  </a:lnTo>
+                  <a:lnTo>
+                    <a:pt x="2650033" y="1259719"/>
+                  </a:lnTo>
+                  <a:lnTo>
+                    <a:pt x="2578410" y="1237663"/>
+                  </a:lnTo>
+                  <a:lnTo>
+                    <a:pt x="2506788" y="1215106"/>
+                  </a:lnTo>
+                  <a:lnTo>
+                    <a:pt x="2435165" y="1192034"/>
+                  </a:lnTo>
+                  <a:lnTo>
+                    <a:pt x="2363543" y="1168437"/>
+                  </a:lnTo>
+                  <a:lnTo>
+                    <a:pt x="2291920" y="1144303"/>
+                  </a:lnTo>
+                  <a:lnTo>
+                    <a:pt x="2220298" y="1119619"/>
+                  </a:lnTo>
+                  <a:lnTo>
+                    <a:pt x="2148675" y="1094372"/>
+                  </a:lnTo>
+                  <a:lnTo>
+                    <a:pt x="2077053" y="1068550"/>
+                  </a:lnTo>
+                  <a:lnTo>
+                    <a:pt x="2005430" y="1042141"/>
+                  </a:lnTo>
+                  <a:lnTo>
+                    <a:pt x="1933808" y="1015129"/>
+                  </a:lnTo>
+                  <a:lnTo>
+                    <a:pt x="1862185" y="987502"/>
+                  </a:lnTo>
+                  <a:lnTo>
+                    <a:pt x="1790563" y="959246"/>
+                  </a:lnTo>
+                  <a:lnTo>
+                    <a:pt x="1718940" y="930347"/>
+                  </a:lnTo>
+                  <a:lnTo>
+                    <a:pt x="1647318" y="900789"/>
+                  </a:lnTo>
+                  <a:lnTo>
+                    <a:pt x="1575695" y="870557"/>
+                  </a:lnTo>
+                  <a:lnTo>
+                    <a:pt x="1504073" y="839637"/>
+                  </a:lnTo>
+                  <a:lnTo>
+                    <a:pt x="1432450" y="808013"/>
+                  </a:lnTo>
+                  <a:lnTo>
+                    <a:pt x="1360827" y="775668"/>
+                  </a:lnTo>
+                  <a:lnTo>
+                    <a:pt x="1289205" y="742587"/>
+                  </a:lnTo>
+                  <a:lnTo>
+                    <a:pt x="1217582" y="708752"/>
+                  </a:lnTo>
+                  <a:lnTo>
+                    <a:pt x="1145960" y="674146"/>
+                  </a:lnTo>
+                  <a:lnTo>
+                    <a:pt x="1074337" y="638752"/>
+                  </a:lnTo>
+                  <a:lnTo>
+                    <a:pt x="1002715" y="602551"/>
+                  </a:lnTo>
+                  <a:lnTo>
+                    <a:pt x="931092" y="565526"/>
+                  </a:lnTo>
+                  <a:lnTo>
+                    <a:pt x="859470" y="527658"/>
+                  </a:lnTo>
+                  <a:lnTo>
+                    <a:pt x="787847" y="488927"/>
+                  </a:lnTo>
+                  <a:lnTo>
+                    <a:pt x="716225" y="449314"/>
+                  </a:lnTo>
+                  <a:lnTo>
+                    <a:pt x="644602" y="408798"/>
+                  </a:lnTo>
+                  <a:lnTo>
+                    <a:pt x="572980" y="367359"/>
+                  </a:lnTo>
+                  <a:lnTo>
+                    <a:pt x="501357" y="324977"/>
+                  </a:lnTo>
+                  <a:lnTo>
+                    <a:pt x="429735" y="281629"/>
+                  </a:lnTo>
+                  <a:lnTo>
+                    <a:pt x="358112" y="237293"/>
+                  </a:lnTo>
+                  <a:lnTo>
+                    <a:pt x="286490" y="191948"/>
+                  </a:lnTo>
+                  <a:lnTo>
+                    <a:pt x="214867" y="145570"/>
+                  </a:lnTo>
+                  <a:lnTo>
+                    <a:pt x="143245" y="98135"/>
+                  </a:lnTo>
+                  <a:lnTo>
+                    <a:pt x="71622" y="49620"/>
                   </a:lnTo>
                   <a:lnTo>
                     <a:pt x="0" y="0"/>
@@ -4520,267 +4511,261 @@
           </p:nvSpPr>
           <p:spPr>
             <a:xfrm>
-              <a:off x="2254132" y="2073503"/>
-              <a:ext cx="6008546" cy="3430798"/>
+              <a:off x="2433493" y="2073503"/>
+              <a:ext cx="5829186" cy="3442977"/>
             </a:xfrm>
             <a:custGeom>
               <a:avLst/>
               <a:pathLst>
-                <a:path w="6008546" h="3430798">
+                <a:path w="5829186" h="3442977">
                   <a:moveTo>
                     <a:pt x="0" y="0"/>
                   </a:moveTo>
                   <a:lnTo>
-                    <a:pt x="63876" y="152042"/>
-                  </a:lnTo>
-                  <a:lnTo>
-                    <a:pt x="135499" y="314223"/>
-                  </a:lnTo>
-                  <a:lnTo>
-                    <a:pt x="207122" y="468509"/>
-                  </a:lnTo>
-                  <a:lnTo>
-                    <a:pt x="278744" y="615284"/>
-                  </a:lnTo>
-                  <a:lnTo>
-                    <a:pt x="350367" y="754915"/>
-                  </a:lnTo>
-                  <a:lnTo>
-                    <a:pt x="421989" y="887749"/>
-                  </a:lnTo>
-                  <a:lnTo>
-                    <a:pt x="493612" y="1014117"/>
-                  </a:lnTo>
-                  <a:lnTo>
-                    <a:pt x="565234" y="1134333"/>
-                  </a:lnTo>
-                  <a:lnTo>
-                    <a:pt x="636857" y="1248698"/>
-                  </a:lnTo>
-                  <a:lnTo>
-                    <a:pt x="708479" y="1357495"/>
-                  </a:lnTo>
-                  <a:lnTo>
-                    <a:pt x="780102" y="1460997"/>
-                  </a:lnTo>
-                  <a:lnTo>
-                    <a:pt x="851724" y="1559460"/>
-                  </a:lnTo>
-                  <a:lnTo>
-                    <a:pt x="923347" y="1653130"/>
-                  </a:lnTo>
-                  <a:lnTo>
-                    <a:pt x="994969" y="1742241"/>
-                  </a:lnTo>
-                  <a:lnTo>
-                    <a:pt x="1066592" y="1827014"/>
-                  </a:lnTo>
-                  <a:lnTo>
-                    <a:pt x="1138214" y="1907660"/>
-                  </a:lnTo>
-                  <a:lnTo>
-                    <a:pt x="1209837" y="1984381"/>
-                  </a:lnTo>
-                  <a:lnTo>
-                    <a:pt x="1281459" y="2057367"/>
-                  </a:lnTo>
-                  <a:lnTo>
-                    <a:pt x="1353082" y="2126800"/>
-                  </a:lnTo>
-                  <a:lnTo>
-                    <a:pt x="1424704" y="2192853"/>
-                  </a:lnTo>
-                  <a:lnTo>
-                    <a:pt x="1496327" y="2255691"/>
-                  </a:lnTo>
-                  <a:lnTo>
-                    <a:pt x="1567950" y="2315471"/>
-                  </a:lnTo>
-                  <a:lnTo>
-                    <a:pt x="1639572" y="2372340"/>
-                  </a:lnTo>
-                  <a:lnTo>
-                    <a:pt x="1711195" y="2426441"/>
-                  </a:lnTo>
-                  <a:lnTo>
-                    <a:pt x="1782817" y="2477908"/>
-                  </a:lnTo>
-                  <a:lnTo>
-                    <a:pt x="1854440" y="2526870"/>
-                  </a:lnTo>
-                  <a:lnTo>
-                    <a:pt x="1926062" y="2573449"/>
-                  </a:lnTo>
-                  <a:lnTo>
-                    <a:pt x="1997685" y="2617761"/>
-                  </a:lnTo>
-                  <a:lnTo>
-                    <a:pt x="2069307" y="2659915"/>
-                  </a:lnTo>
-                  <a:lnTo>
-                    <a:pt x="2140930" y="2700017"/>
-                  </a:lnTo>
-                  <a:lnTo>
-                    <a:pt x="2212552" y="2738168"/>
-                  </a:lnTo>
-                  <a:lnTo>
-                    <a:pt x="2284175" y="2774461"/>
-                  </a:lnTo>
-                  <a:lnTo>
-                    <a:pt x="2355797" y="2808987"/>
-                  </a:lnTo>
-                  <a:lnTo>
-                    <a:pt x="2427420" y="2841833"/>
-                  </a:lnTo>
-                  <a:lnTo>
-                    <a:pt x="2499042" y="2873080"/>
-                  </a:lnTo>
-                  <a:lnTo>
-                    <a:pt x="2570665" y="2902806"/>
-                  </a:lnTo>
-                  <a:lnTo>
-                    <a:pt x="2642287" y="2931085"/>
-                  </a:lnTo>
-                  <a:lnTo>
-                    <a:pt x="2713910" y="2957988"/>
-                  </a:lnTo>
-                  <a:lnTo>
-                    <a:pt x="2785532" y="2983581"/>
-                  </a:lnTo>
-                  <a:lnTo>
-                    <a:pt x="2857155" y="3007928"/>
-                  </a:lnTo>
-                  <a:lnTo>
-                    <a:pt x="2928778" y="3031089"/>
-                  </a:lnTo>
-                  <a:lnTo>
-                    <a:pt x="3000400" y="3053124"/>
-                  </a:lnTo>
-                  <a:lnTo>
-                    <a:pt x="3072023" y="3074086"/>
-                  </a:lnTo>
-                  <a:lnTo>
-                    <a:pt x="3143645" y="3094027"/>
-                  </a:lnTo>
-                  <a:lnTo>
-                    <a:pt x="3215268" y="3112998"/>
-                  </a:lnTo>
-                  <a:lnTo>
-                    <a:pt x="3286890" y="3131045"/>
-                  </a:lnTo>
-                  <a:lnTo>
-                    <a:pt x="3358513" y="3148214"/>
-                  </a:lnTo>
-                  <a:lnTo>
-                    <a:pt x="3430135" y="3164547"/>
-                  </a:lnTo>
-                  <a:lnTo>
-                    <a:pt x="3501758" y="3180085"/>
-                  </a:lnTo>
-                  <a:lnTo>
-                    <a:pt x="3573380" y="3194867"/>
-                  </a:lnTo>
-                  <a:lnTo>
-                    <a:pt x="3645003" y="3208929"/>
-                  </a:lnTo>
-                  <a:lnTo>
-                    <a:pt x="3716625" y="3222306"/>
-                  </a:lnTo>
-                  <a:lnTo>
-                    <a:pt x="3788248" y="3235033"/>
-                  </a:lnTo>
-                  <a:lnTo>
-                    <a:pt x="3859870" y="3247139"/>
-                  </a:lnTo>
-                  <a:lnTo>
-                    <a:pt x="3931493" y="3258657"/>
-                  </a:lnTo>
-                  <a:lnTo>
-                    <a:pt x="4003115" y="3269614"/>
-                  </a:lnTo>
-                  <a:lnTo>
-                    <a:pt x="4074738" y="3280037"/>
-                  </a:lnTo>
-                  <a:lnTo>
-                    <a:pt x="4146360" y="3289954"/>
-                  </a:lnTo>
-                  <a:lnTo>
-                    <a:pt x="4217983" y="3299387"/>
-                  </a:lnTo>
-                  <a:lnTo>
-                    <a:pt x="4289606" y="3308361"/>
-                  </a:lnTo>
-                  <a:lnTo>
-                    <a:pt x="4361228" y="3316899"/>
-                  </a:lnTo>
-                  <a:lnTo>
-                    <a:pt x="4432851" y="3325020"/>
-                  </a:lnTo>
-                  <a:lnTo>
-                    <a:pt x="4504473" y="3332747"/>
-                  </a:lnTo>
-                  <a:lnTo>
-                    <a:pt x="4576096" y="3340097"/>
-                  </a:lnTo>
-                  <a:lnTo>
-                    <a:pt x="4647718" y="3347090"/>
-                  </a:lnTo>
-                  <a:lnTo>
-                    <a:pt x="4719341" y="3353742"/>
-                  </a:lnTo>
-                  <a:lnTo>
-                    <a:pt x="4790963" y="3360070"/>
-                  </a:lnTo>
-                  <a:lnTo>
-                    <a:pt x="4862586" y="3366091"/>
-                  </a:lnTo>
-                  <a:lnTo>
-                    <a:pt x="4934208" y="3371818"/>
-                  </a:lnTo>
-                  <a:lnTo>
-                    <a:pt x="5005831" y="3377266"/>
-                  </a:lnTo>
-                  <a:lnTo>
-                    <a:pt x="5077453" y="3382449"/>
-                  </a:lnTo>
-                  <a:lnTo>
-                    <a:pt x="5149076" y="3387380"/>
-                  </a:lnTo>
-                  <a:lnTo>
-                    <a:pt x="5220698" y="3392071"/>
-                  </a:lnTo>
-                  <a:lnTo>
-                    <a:pt x="5292321" y="3396534"/>
-                  </a:lnTo>
-                  <a:lnTo>
-                    <a:pt x="5363943" y="3400779"/>
-                  </a:lnTo>
-                  <a:lnTo>
-                    <a:pt x="5435566" y="3404818"/>
-                  </a:lnTo>
-                  <a:lnTo>
-                    <a:pt x="5507188" y="3408660"/>
-                  </a:lnTo>
-                  <a:lnTo>
-                    <a:pt x="5578811" y="3412315"/>
-                  </a:lnTo>
-                  <a:lnTo>
-                    <a:pt x="5650434" y="3415792"/>
-                  </a:lnTo>
-                  <a:lnTo>
-                    <a:pt x="5722056" y="3419100"/>
-                  </a:lnTo>
-                  <a:lnTo>
-                    <a:pt x="5793679" y="3422247"/>
-                  </a:lnTo>
-                  <a:lnTo>
-                    <a:pt x="5865301" y="3425241"/>
-                  </a:lnTo>
-                  <a:lnTo>
-                    <a:pt x="5936924" y="3428088"/>
-                  </a:lnTo>
-                  <a:lnTo>
-                    <a:pt x="6008546" y="3430798"/>
+                    <a:pt x="27761" y="74228"/>
+                  </a:lnTo>
+                  <a:lnTo>
+                    <a:pt x="99384" y="255548"/>
+                  </a:lnTo>
+                  <a:lnTo>
+                    <a:pt x="171006" y="427225"/>
+                  </a:lnTo>
+                  <a:lnTo>
+                    <a:pt x="242629" y="589772"/>
+                  </a:lnTo>
+                  <a:lnTo>
+                    <a:pt x="314251" y="743675"/>
+                  </a:lnTo>
+                  <a:lnTo>
+                    <a:pt x="385874" y="889393"/>
+                  </a:lnTo>
+                  <a:lnTo>
+                    <a:pt x="457496" y="1027362"/>
+                  </a:lnTo>
+                  <a:lnTo>
+                    <a:pt x="529119" y="1157993"/>
+                  </a:lnTo>
+                  <a:lnTo>
+                    <a:pt x="600741" y="1281678"/>
+                  </a:lnTo>
+                  <a:lnTo>
+                    <a:pt x="672364" y="1398785"/>
+                  </a:lnTo>
+                  <a:lnTo>
+                    <a:pt x="743986" y="1509664"/>
+                  </a:lnTo>
+                  <a:lnTo>
+                    <a:pt x="815609" y="1614647"/>
+                  </a:lnTo>
+                  <a:lnTo>
+                    <a:pt x="887231" y="1714046"/>
+                  </a:lnTo>
+                  <a:lnTo>
+                    <a:pt x="958854" y="1808160"/>
+                  </a:lnTo>
+                  <a:lnTo>
+                    <a:pt x="1030476" y="1897268"/>
+                  </a:lnTo>
+                  <a:lnTo>
+                    <a:pt x="1102099" y="1981638"/>
+                  </a:lnTo>
+                  <a:lnTo>
+                    <a:pt x="1173721" y="2061520"/>
+                  </a:lnTo>
+                  <a:lnTo>
+                    <a:pt x="1245344" y="2137155"/>
+                  </a:lnTo>
+                  <a:lnTo>
+                    <a:pt x="1316967" y="2208767"/>
+                  </a:lnTo>
+                  <a:lnTo>
+                    <a:pt x="1388589" y="2276571"/>
+                  </a:lnTo>
+                  <a:lnTo>
+                    <a:pt x="1460212" y="2340769"/>
+                  </a:lnTo>
+                  <a:lnTo>
+                    <a:pt x="1531834" y="2401553"/>
+                  </a:lnTo>
+                  <a:lnTo>
+                    <a:pt x="1603457" y="2459105"/>
+                  </a:lnTo>
+                  <a:lnTo>
+                    <a:pt x="1675079" y="2513596"/>
+                  </a:lnTo>
+                  <a:lnTo>
+                    <a:pt x="1746702" y="2565189"/>
+                  </a:lnTo>
+                  <a:lnTo>
+                    <a:pt x="1818324" y="2614038"/>
+                  </a:lnTo>
+                  <a:lnTo>
+                    <a:pt x="1889947" y="2660290"/>
+                  </a:lnTo>
+                  <a:lnTo>
+                    <a:pt x="1961569" y="2704081"/>
+                  </a:lnTo>
+                  <a:lnTo>
+                    <a:pt x="2033192" y="2745544"/>
+                  </a:lnTo>
+                  <a:lnTo>
+                    <a:pt x="2104814" y="2784802"/>
+                  </a:lnTo>
+                  <a:lnTo>
+                    <a:pt x="2176437" y="2821972"/>
+                  </a:lnTo>
+                  <a:lnTo>
+                    <a:pt x="2248059" y="2857166"/>
+                  </a:lnTo>
+                  <a:lnTo>
+                    <a:pt x="2319682" y="2890488"/>
+                  </a:lnTo>
+                  <a:lnTo>
+                    <a:pt x="2391304" y="2922037"/>
+                  </a:lnTo>
+                  <a:lnTo>
+                    <a:pt x="2462927" y="2951909"/>
+                  </a:lnTo>
+                  <a:lnTo>
+                    <a:pt x="2534549" y="2980193"/>
+                  </a:lnTo>
+                  <a:lnTo>
+                    <a:pt x="2606172" y="3006972"/>
+                  </a:lnTo>
+                  <a:lnTo>
+                    <a:pt x="2677795" y="3032327"/>
+                  </a:lnTo>
+                  <a:lnTo>
+                    <a:pt x="2749417" y="3056334"/>
+                  </a:lnTo>
+                  <a:lnTo>
+                    <a:pt x="2821040" y="3079064"/>
+                  </a:lnTo>
+                  <a:lnTo>
+                    <a:pt x="2892662" y="3100585"/>
+                  </a:lnTo>
+                  <a:lnTo>
+                    <a:pt x="2964285" y="3120961"/>
+                  </a:lnTo>
+                  <a:lnTo>
+                    <a:pt x="3035907" y="3140255"/>
+                  </a:lnTo>
+                  <a:lnTo>
+                    <a:pt x="3107530" y="3158522"/>
+                  </a:lnTo>
+                  <a:lnTo>
+                    <a:pt x="3179152" y="3175817"/>
+                  </a:lnTo>
+                  <a:lnTo>
+                    <a:pt x="3250775" y="3192193"/>
+                  </a:lnTo>
+                  <a:lnTo>
+                    <a:pt x="3322397" y="3207698"/>
+                  </a:lnTo>
+                  <a:lnTo>
+                    <a:pt x="3394020" y="3222378"/>
+                  </a:lnTo>
+                  <a:lnTo>
+                    <a:pt x="3465642" y="3236278"/>
+                  </a:lnTo>
+                  <a:lnTo>
+                    <a:pt x="3537265" y="3249438"/>
+                  </a:lnTo>
+                  <a:lnTo>
+                    <a:pt x="3608887" y="3261899"/>
+                  </a:lnTo>
+                  <a:lnTo>
+                    <a:pt x="3680510" y="3273697"/>
+                  </a:lnTo>
+                  <a:lnTo>
+                    <a:pt x="3752132" y="3284868"/>
+                  </a:lnTo>
+                  <a:lnTo>
+                    <a:pt x="3823755" y="3295444"/>
+                  </a:lnTo>
+                  <a:lnTo>
+                    <a:pt x="3895377" y="3305458"/>
+                  </a:lnTo>
+                  <a:lnTo>
+                    <a:pt x="3967000" y="3314939"/>
+                  </a:lnTo>
+                  <a:lnTo>
+                    <a:pt x="4038622" y="3323917"/>
+                  </a:lnTo>
+                  <a:lnTo>
+                    <a:pt x="4110245" y="3332416"/>
+                  </a:lnTo>
+                  <a:lnTo>
+                    <a:pt x="4181868" y="3340464"/>
+                  </a:lnTo>
+                  <a:lnTo>
+                    <a:pt x="4253490" y="3348084"/>
+                  </a:lnTo>
+                  <a:lnTo>
+                    <a:pt x="4325113" y="3355299"/>
+                  </a:lnTo>
+                  <a:lnTo>
+                    <a:pt x="4396735" y="3362130"/>
+                  </a:lnTo>
+                  <a:lnTo>
+                    <a:pt x="4468358" y="3368597"/>
+                  </a:lnTo>
+                  <a:lnTo>
+                    <a:pt x="4539980" y="3374721"/>
+                  </a:lnTo>
+                  <a:lnTo>
+                    <a:pt x="4611603" y="3380519"/>
+                  </a:lnTo>
+                  <a:lnTo>
+                    <a:pt x="4683225" y="3386009"/>
+                  </a:lnTo>
+                  <a:lnTo>
+                    <a:pt x="4754848" y="3391206"/>
+                  </a:lnTo>
+                  <a:lnTo>
+                    <a:pt x="4826470" y="3396128"/>
+                  </a:lnTo>
+                  <a:lnTo>
+                    <a:pt x="4898093" y="3400787"/>
+                  </a:lnTo>
+                  <a:lnTo>
+                    <a:pt x="4969715" y="3405199"/>
+                  </a:lnTo>
+                  <a:lnTo>
+                    <a:pt x="5041338" y="3409376"/>
+                  </a:lnTo>
+                  <a:lnTo>
+                    <a:pt x="5112960" y="3413331"/>
+                  </a:lnTo>
+                  <a:lnTo>
+                    <a:pt x="5184583" y="3417076"/>
+                  </a:lnTo>
+                  <a:lnTo>
+                    <a:pt x="5256205" y="3420622"/>
+                  </a:lnTo>
+                  <a:lnTo>
+                    <a:pt x="5327828" y="3423979"/>
+                  </a:lnTo>
+                  <a:lnTo>
+                    <a:pt x="5399450" y="3427157"/>
+                  </a:lnTo>
+                  <a:lnTo>
+                    <a:pt x="5471073" y="3430166"/>
+                  </a:lnTo>
+                  <a:lnTo>
+                    <a:pt x="5542696" y="3433016"/>
+                  </a:lnTo>
+                  <a:lnTo>
+                    <a:pt x="5614318" y="3435714"/>
+                  </a:lnTo>
+                  <a:lnTo>
+                    <a:pt x="5685941" y="3438268"/>
+                  </a:lnTo>
+                  <a:lnTo>
+                    <a:pt x="5757563" y="3440687"/>
+                  </a:lnTo>
+                  <a:lnTo>
+                    <a:pt x="5829186" y="3442977"/>
                   </a:lnTo>
                 </a:path>
               </a:pathLst>
@@ -4852,7 +4837,7 @@
           </p:nvSpPr>
           <p:spPr>
             <a:xfrm>
-              <a:off x="4313661" y="2073503"/>
+              <a:off x="4313914" y="2073503"/>
               <a:ext cx="0" cy="3649639"/>
             </a:xfrm>
             <a:custGeom>
@@ -5125,7 +5110,7 @@
           </p:nvSpPr>
           <p:spPr>
             <a:xfrm>
-              <a:off x="1343342" y="5785772"/>
+              <a:off x="1344940" y="5785772"/>
               <a:ext cx="161574" cy="80101"/>
             </a:xfrm>
             <a:prstGeom prst="rect">
@@ -5171,7 +5156,7 @@
           </p:nvSpPr>
           <p:spPr>
             <a:xfrm>
-              <a:off x="2280620" y="5785772"/>
+              <a:off x="2281218" y="5785772"/>
               <a:ext cx="161574" cy="80101"/>
             </a:xfrm>
             <a:prstGeom prst="rect">
@@ -5217,7 +5202,7 @@
           </p:nvSpPr>
           <p:spPr>
             <a:xfrm>
-              <a:off x="3217897" y="5785772"/>
+              <a:off x="3217496" y="5785772"/>
               <a:ext cx="161574" cy="80101"/>
             </a:xfrm>
             <a:prstGeom prst="rect">
@@ -5263,7 +5248,7 @@
           </p:nvSpPr>
           <p:spPr>
             <a:xfrm>
-              <a:off x="4204872" y="5785772"/>
+              <a:off x="4203472" y="5785772"/>
               <a:ext cx="62179" cy="80101"/>
             </a:xfrm>
             <a:prstGeom prst="rect">
@@ -5309,7 +5294,7 @@
           </p:nvSpPr>
           <p:spPr>
             <a:xfrm>
-              <a:off x="5111060" y="5785772"/>
+              <a:off x="5108660" y="5785772"/>
               <a:ext cx="124358" cy="80101"/>
             </a:xfrm>
             <a:prstGeom prst="rect">
@@ -5355,7 +5340,7 @@
           </p:nvSpPr>
           <p:spPr>
             <a:xfrm>
-              <a:off x="6048338" y="5785772"/>
+              <a:off x="6044938" y="5785772"/>
               <a:ext cx="124358" cy="80101"/>
             </a:xfrm>
             <a:prstGeom prst="rect">
@@ -5401,7 +5386,7 @@
           </p:nvSpPr>
           <p:spPr>
             <a:xfrm>
-              <a:off x="6985615" y="5785772"/>
+              <a:off x="6981216" y="5785772"/>
               <a:ext cx="124358" cy="80101"/>
             </a:xfrm>
             <a:prstGeom prst="rect">
@@ -5447,7 +5432,7 @@
           </p:nvSpPr>
           <p:spPr>
             <a:xfrm>
-              <a:off x="7922893" y="5785772"/>
+              <a:off x="7917494" y="5785772"/>
               <a:ext cx="124358" cy="80101"/>
             </a:xfrm>
             <a:prstGeom prst="rect">
@@ -5586,7 +5571,7 @@
           <p:spPr>
             <a:xfrm>
               <a:off x="817517" y="1896563"/>
-              <a:ext cx="6385163" cy="82021"/>
+              <a:ext cx="6451914" cy="82021"/>
             </a:xfrm>
             <a:prstGeom prst="rect">
               <a:avLst/>
@@ -5618,7 +5603,7 @@
                   <a:latin typeface="Helvetica"/>
                   <a:cs typeface="Helvetica"/>
                 </a:rPr>
-                <a:t>subHR per 10 % decline: 1.92 (1.30-2.84), p = 0.001  |  per IQR decline (Δ = 25.8 %): 5.40 (1.98-14.78)  |  IQR: [-10.7, 15.1] %</a:t>
+                <a:t>subHR per 10 % decline: 2.04 (1.34-3.11), p = &lt;0.001  |  per IQR decline (Δ = 25.8 %): 6.32 (2.14-18.67)  |  IQR: [-10.6, 15.2] %</a:t>
               </a:r>
             </a:p>
           </p:txBody>
